--- a/katanox-deck.pptx
+++ b/katanox-deck.pptx
@@ -536,7 +536,7 @@
           <a:lstStyle/>
           <a:p>
             <a:r>
-              <a:t>Bonjour à tous, nous allons aujourd'hui examiner le dossier d'investissement de Katanox. Katanox est une FinTech qui propose une infrastructure financière automatisée pour le secteur hôtelier. Il s'agit d'une plateforme SaaS qui facilite les règlements directs et la distribution automatisée en Europe et en Amérique du Nord. Notre intérêt principal réside dans sa capacité à désintermédier les échanges financiers dans le secteur du voyage, un domaine où les inefficacités sont nombreuses et les marges élevées pour les intermédiaires. Nous allons détailler pourquoi ce dossier présente un "Signal Mixte" et les éléments à approfondir.</a:t>
+              <a:t>Bonjour à tous. Nous allons aujourd'hui examiner Katanox, une startup Fintech qui opère dans le secteur de l'infrastructure financière automatisée pour l'hôtellerie. Fondée en 2020, Katanox se positionne comme une plateforme SaaS révolutionnaire, visant à remplacer les systèmes de paiement obsolètes par des règlements directs et une distribution automatisée, principalement en Europe et en Amérique du Nord. Notre intérêt se porte sur sa capacité à transformer un marché fragmenté et souvent inefficace. Nous avons mené une analyse approfondie pour évaluer son potentiel d'investissement.</a:t>
             </a:r>
           </a:p>
         </p:txBody>
@@ -606,7 +606,7 @@
           <a:lstStyle/>
           <a:p>
             <a:r>
-              <a:t>Cette slide présente les principaux acteurs opérant à chaque étape de la chaîne de valeur. Nous avons identifié les géants, les grands acteurs, les scaleups et les startups, avec leur positionnement et leur différenciation. Il est important de noter que Katanox, en tant que niche, se positionne à l'étape des paiements et règlements directs. L'analyse révèle un paysage concurrentiel varié, avec des acteurs très établis et des innovateurs émergents. Cette vue détaillée nous aidera à identifier les opportunités et les menaces pour Katanox.</a:t>
+              <a:t>L'étape 'Facturation et Revenue Management' est cruciale, avec un score stratégique de 8.1. Sa haute défendabilité repose sur la complexité du pricing saisonnier et l'intelligence artificielle. Les acteurs dominants établissent des 'data moats' via l'historique des données, capturant une part importante de la valeur. Le marché bénéficie d'une croissance CAGR de 16-20% grâce à l'IA. Cette étape offre des marges premium pour les solutions SaaS. L'investissement dans ce domaine permet de capitaliser sur l'optimisation RevPAR et les capacités de pricing dynamique des hôtels.</a:t>
             </a:r>
           </a:p>
         </p:txBody>
@@ -676,7 +676,7 @@
           <a:lstStyle/>
           <a:p>
             <a:r>
-              <a:t>Le Magic Quadrant des concurrents résume le positionnement des acteurs clés. Les "Leaders Établis" comme Canary Technologies et Mews démontrent une forte maturite et différenciation. Les "Innovateurs Émergents" tels qu'Hotelverse et Katanox montrent un grand potentiel technologique mais sont à des stades plus précoces. Il n'y a pas d'entreprises spécifiques dans le quadrant des produits commoditisés matures, ce qui indique que le marché reste dynamique et axé sur la valeur ajoutée. L'image illustre la répartition de ces acteurs, positionnant Katanox parmi les innovateurs émergents.</a:t>
+              <a:t>L'étape 'Paiements et Règlements Directs' détient un score stratégique de 8.0. Sa forte défendabilité est assurée par des réseaux 'two-sided' et des réglementations comme la PSD2. Les marges sont élevées et le marché global (TAM de 2,9 Md USD) croît à un CAGR de 19%. C'est un goulet d'étranglement critique, reliant la trésorerie à la réconciliation dans un secteur fragmenté. Les plateformes d'orchestration qui dominent cette étape bénéficient d'un avantage structurel et d'un pouvoir de fixation des prix. L'investissement ici capture l'automatisation essentielle des règlements directs.</a:t>
             </a:r>
           </a:p>
         </p:txBody>
@@ -746,7 +746,7 @@
           <a:lstStyle/>
           <a:p>
             <a:r>
-              <a:t>Le quadrant M&amp;A nous permet de visualiser les dynamiques de fusion-acquisition dans le marché de Katanox. Nous avons identifié des "Prédateurs" tels qu'Oracle Hospitality et Stripe, des "Aspirants" comme Tebi et Katanox, et des "Géants" comme Adyen et Cloudbeds qui préfèrent la croissance organique. Katanox, de par son positionnement et sa technologie, est une "Cible Potentielle" en raison de ses licences stratégiques et de son expertise. L'image représente cette cartographie, soulignant les forces en jeu et les opportunités de consolidation. Nous allons détailler ces catégories.</a:t>
+              <a:t>L'étape 'Intégration et Orchestration' obtient un score stratégique de 7.2, signalant un intérêt notable. Sa défendabilité repose sur les réseaux 'marketplace APIs' et sa capacité de scalabilité en tant que solution cloud. Le marché des PMS pour l'hôtellerie croît à 20% de CAGR avec l'adoption du cloud. Cette étape représente un hub d'interopérabilité essentiel pour la 'stack' financière. Malgré la domination de géants comme Oracle, il existe des niches pour des acteurs agiles. L'investissement ici ouvre des opportunités de croissance via les API et la 'embedded fintech'.</a:t>
             </a:r>
           </a:p>
         </p:txBody>
@@ -816,7 +816,7 @@
           <a:lstStyle/>
           <a:p>
             <a:r>
-              <a:t>Les prédateurs sont des acteurs dotés de ressources importantes, qui ciblent activement les acquisitions pour élargir leur écosystème ou renforcer leurs positions. Oracle Hospitality, Worldline, Stripe, IXOPAY et Mews se distinguent parmi ces "chasseurs". Leurs antécédents en fusions-acquisitions, leurs financements conséquents et leurs stratégies d'expansion en font des acteurs à surveiller. Pour Katanox, ces prédateurs représentent à la fois une menace et une opportunité potentielle d'exit, notamment grâce à leurs budgets d'acquisition significatifs. Katanox doit développer une stratégie pour soit les éviter, soit en devenir une cible de choix.</a:t>
+              <a:t>Le marché de l'hôtellerie est en pleine mutation. L'orchestration des paiements explose, stimulée par l'adoption des paiements PAI et l'unification européenne via Wero/EPI. Le TAM mondial atteint 2,9 milliards USD avec un CAGR de 19-20%. Cette transition est une aubaine pour Katanox. Le pouvoir est concentré à l'étape des 'Paiements et Règlements Directs', qui sert de goulet d'étranglement critique. Les acteurs traditionnels FP&amp;A peinent à s'adapter, laissant la place à des SaaS verticaux. Le pool de profits se déplace vers les services à haute marge. Ces tendances structurelles sont favorables à Katanox.</a:t>
             </a:r>
           </a:p>
         </p:txBody>
@@ -886,7 +886,7 @@
           <a:lstStyle/>
           <a:p>
             <a:r>
-              <a:t>Les aspirants sont des entreprises qui, comme Katanox, cherchent à saisir des opportunités pour étendre leur présence ou compléter leurs offres. Ces acteurs, bien que disposant de capacités d'acquisition plus faibles que les prédateurs, sont stratégiquement agiles. Tebi, Hotelverse, Katanox, Horago, ROH, Folio, Prostay, Libeo, Phacet, Profitize, Veridian, Docyt, Apaleo Pay, Atomize, Noovy, Apidata, Ruby et Clock se positionnent sur des segments innovants et sont prêts à former des alliances. Pour Katanox, il s'agit de trouver les bons partenaires pour renforcer son offre face aux géants du marché. Ces acteurs sont aussi des cibles de choix pour les prédateurs.</a:t>
+              <a:t>Les acteurs du marché sont variés, des géants établis aux startups innovantes, chacun occupant une position spécifique dans la chaîne de valeur. Par exemple, la Banque de France opère dans le financement et la gestion de trésorerie, tandis que Worldline et Stripe sont des acteurs dominants dans les paiements et règlements directs. Mews se distingue également dans les paiements et règlements directs avec une forte activité M&amp;A. Comprendre ces dynamiques concurrentielles est essentiel pour évaluer la position de Katanox. Nous allons explorer en détail le rôle et la posture de chaque acteur clé.</a:t>
             </a:r>
           </a:p>
         </p:txBody>
@@ -956,7 +956,7 @@
           <a:lstStyle/>
           <a:p>
             <a:r>
-              <a:t>Les géants, tels qu'Adyen, Cloudbeds et Shiji Group, disposent d'une forte capacité financière mais privilégient généralement la croissance organique et les partenariats stratégiques plutôt que les acquisitions majeures. Ils sont des "forteresses" dans leur marché, cherchant à défendre leur position par le renforcement de leurs produits existants. Leur faible motivation pour les fusions-acquisitions signifie qu'ils sont moins susceptibles de s'intéresser à Katanox en tant que cible d'acquisition directe, mais pourraient être des partenaires stratégiques importants. Nous devons comprendre la dynamique de ces acteurs.</a:t>
+              <a:t>Le Magic Quadrant de la Concurrence nous permet de visualiser le positionnement des acteurs du marché en fonction de leur maturité et de leur différenciation. Les 'Leaders Établis' comme Mews et Canary Technologies montrent une forte traction et des offres robustes. Les 'Innovateurs Émergents' tels qu'Hotelverse et Katanox présentent un fort potentiel d'innovation. Il n'y a pas de produits commoditisés matures, ce qui indique un marché encore en évolution. Enfin, les 'Peu Différenciés Précoces' représentent des solutions en phase d'exploration. Ce quadrant offre une vue d'ensemble du paysage concurrentiel pour Katanox.</a:t>
             </a:r>
           </a:p>
         </p:txBody>
@@ -1026,7 +1026,7 @@
           <a:lstStyle/>
           <a:p>
             <a:r>
-              <a:t>Les cibles potentielles sont des entreprises qui, malgré une capacité d'acquisition faible, représentent des atouts stratégiques en raison de leur innovation. Canary Technologies, la Banque de France et Trevium sont d'excellents exemples. Ces entreprises sont mûres pour une acquisition ou une alliance, et pourraient être approchées pour leurs spécialisations uniques. Pour Katanox, comprendre ce quadrant permet d'identifier ses propres opportunités en tant que cible de valeur et les types d'acteurs qui pourraient s'intéresser à son modèle. Cela confirme l'intérêt principal du dossier.</a:t>
+              <a:t>Le Quadrant M&amp;A de la Concurrence cartographie les potentiels acheteurs et cibles du marché. Les 'Prédateurs' comme Oracle Hospitality, Stripe et Mews sont des acquéreurs puissants. Les 'Aspirants', dont Katanox et Tebi, sont proactifs mais avec une capacité d'acquisition limitée. Les 'Géants', comme Adyen et Cloudbeds, ont de larges ressources mais une faible motivation M&amp;A. Enfin, les 'Cibles Potentielles' incluent Canary Technologies, Banque de France et Trevium, matures pour une acquisition ou un partenariat. Ce quadrant donne une vision des mouvements stratégiques possibles dans l'écosystème de Katanox.</a:t>
             </a:r>
           </a:p>
         </p:txBody>
@@ -1096,7 +1096,7 @@
           <a:lstStyle/>
           <a:p>
             <a:r>
-              <a:t>Cette section détaille les scénarios stratégiques de M&amp;A que nous avons identifiés, fondés sur l'analyse de marché et les signaux faibles des acteurs. Ces scénarios sont des hypothèses que nous devons valider en due diligence, mais ils nous donnent une feuille de route des opportunités et des menaces. Nous avons listé les batailles d'acquisition, les alliances inévitables, les menaces d'étranglement, les consolidations de marché, les résistances défensives et les cibles pivots. L'image illustre le cadre général de ces scénarios. Nous allons à présent décrire chacun d'eux.</a:t>
+              <a:t>Analysons maintenant les scénarios stratégiques. Ces mouvements potentiels dans le marché M&amp;A sont hypothétiques, mais ils éclairent les dynamiques concurrentielles et les opportunités pour Katanox. Nous avons identifié six types de scénarios : les batailles d'acquisition, les alliances inévitables, les menaces d'étranglement, la consolidation de marché, les cibles pivots et les opportunités manquées. Ces scénarios, générés par IA, sont conçus pour stimuler notre réflexion et anticiper les évolutions futures. Ils nous aideront à mieux évaluer la posture et les vulnérabilités de Katanox.</a:t>
             </a:r>
           </a:p>
         </p:txBody>
@@ -1166,7 +1166,7 @@
           <a:lstStyle/>
           <a:p>
             <a:r>
-              <a:t>Le premier scénario décrit une bataille d'acquisition à fort conflit entre Oracle Hospitality et Mews pour Katanox. Katanox est une cible de choix en raison de ses licences PSD2 et FCA, sa connectivité A2A, et l'expertise de son fondateur, des actifs rares et précieux. Notre analyse révèle un potentiel de synergie total de 5,5 millions d'euros, provenant d'économies sur le développement réglementaire et d'un potentiel d'upsell significatif. Ce scénario, défendable avec une confiance de 55%, souligne la position stratégique de Katanox. Les détails prouvent l'importance de ce dossier pour notre thèse.</a:t>
+              <a:t>La section des synergies entre acteurs fournit une analyse quantitative et qualitative des collaborations potentielles. Katanox, en tant qu'actif pivot, est au cœur des scénarios de consolidation. Les synergies les plus importantes se concentrent autour de l'acquisition de Katanox par des acteurs comme Mews ou Oracle Hospitality, évaluant son impact financier. Les scénarios défensifs, en revanche, ne créent pas de synergies nettes mais protègent des parts de marché. Ce tableau met en lumière la valeur stratégique de Katanox dans un écosystème compétitif et en pleine évolution.</a:t>
             </a:r>
           </a:p>
         </p:txBody>
@@ -1236,7 +1236,7 @@
           <a:lstStyle/>
           <a:p>
             <a:r>
-              <a:t>Le second scénario met en lumière la compétition entre Stripe et Mews pour l'acquisition de Canary Technologies. Cette bataille concerne un algorithme de prévention de la fraude et une certification PCI niveau 1, des éléments cruciaux dans l'hôtellerie IA. Le potentiel de synergie est élevé, à 7,5 millions d'euros, grâce aux économies sur le développement d'un algorithme équivalent et à l'upsell de services de paiements orchestrés. Ce scénario, avec une confiance de 65%, est une indication du dynamisme de l'industrie FinTech hôtelière et de l'importance de solutions spécialisées pour le développement de notre portefeuille.</a:t>
+              <a:t>Passons maintenant à l'analyse interne de Katanox. Cette section détaille la proposition de valeur de l'entreprise, son produit, son modèle économique, son équipe et le profil de son CEO. Nous examinerons ce qui rend Katanox unique et comment ces éléments contribuent à sa réussite ou représentent des défis. Une compréhension approfondie de ces aspects est cruciale pour valider l'adéquation de Katanox avec notre thèse d'investissement. Nous verrons comment ses forces sont exploitées et ses faiblesses gérées.</a:t>
             </a:r>
           </a:p>
         </p:txBody>
@@ -1306,7 +1306,7 @@
           <a:lstStyle/>
           <a:p>
             <a:r>
-              <a:t>Pour commencer cette revu, voici une vue synthétique des informations clés concernant Katanox, notamment son secteur d'activité, sa proposition de valeur et sa localisation géographique. Il s'agit d'une FinTech B2B qui adresse spécifiquement l'industrie hôtelière avec une plateforme innovante. Nous constatons que la société opère à partir de hubs internationaux. Le statut "Seed" de l'entreprise montre qu'elle est encore en phase de développement, nécessitant une évaluation rigoureuse de son potentiel et de ses risques. Le score de pré-sélection de 78/100 indique un signal mixte, justifiant l'attention portée à ce dossier.</a:t>
+              <a:t>Katanox est une plateforme SaaS qui propose une infrastructure financière automatisée spécifiquement conçue pour l'hôtellerie. Son objectif est de révolutionner les règlements directs et la distribution automatique dans ce secteur. En d'autres termes, elle vise à éliminer les intermédiaires coûteux et les processus manuels qui ralentissent traditionnellement les transactions hôtelières. Cette technologie est applicable en Europe et en Amérique du Nord, offrant un vaste champ d'action pour son développement. Nous verrons comment cette approche peut générer une valeur significative.</a:t>
             </a:r>
           </a:p>
         </p:txBody>
@@ -1376,7 +1376,7 @@
           <a:lstStyle/>
           <a:p>
             <a:r>
-              <a:t>Le troisième scénario évoque les alliances inévitables, et plus précisément une alliance stratégique entre Mews et Katanox. Cette alliance permettrait d'intégrer les paiements compte-à-compte automatisés de Katanox, dotés des licences PSD2 et FCA, dans l'écosystème Mews pour dominer les paiements directs hôteliers. Le potentiel de synergie est de 5,5 millions d'euros, résultant d'économies sur l'obtention des licences réglementaires et de l'optim_isation de l'ARPU. Ce scénario affiche une confiance de 65%, soulignant la complémentarité des deux acteurs dans un marché en forte croissance.</a:t>
+              <a:t>Katanox se positionne comme une plateforme d'infrastructure financière et de distribution, remplaçant les réseaux de cartes par des paiements directs. Son ICP cible les hôtels moyens européens, les groupes hôteliers et les agences de voyages. Opérant en B2B dans la Fintech, l'hôtellerie et la Travel Tech, elle vise à éliminer l'intermédiation coûteuse. Katanox est licenciée PSD2/FCA, basée à Amsterdam, Londres et New York. Des partenariats avec Travelodge et Oracle Cloud Marketplace attestent de sa traction. Sa proposition de valeur est de fluidifier les paiements, réduire les commissions et automatiser la distribution pour un gain de trésorerie.</a:t>
             </a:r>
           </a:p>
         </p:txBody>
@@ -1446,7 +1446,7 @@
           <a:lstStyle/>
           <a:p>
             <a:r>
-              <a:t>Le quatrième scénario met en lumière la menace d'étranglement qui pèse sur Katanox de la part d'Oracle Hospitality et Mews. Ces deux acteurs pourraient simultanément comprimer l'espace de survie indépendante de Katanox : Oracle via ses intégrations natives, et Mews par l'acquisition d'acteurs complémentaires. Le potentiel de synergie est nul dans ce scénario, car il s'agit d'une menace existentielle plutôt que d'une création de valeur. La confiance est de 65%. La prudence est clairement de mise sur ce dossier.</a:t>
+              <a:t>Le produit de Katanox est une infrastructure financière et une plateforme de distribution pour l'hôtellerie qui s'attaque aux problèmes des paiements indirects. Ses capacités incluent l'automatisation des règlements compte-à-compte, la réconciliation des factures, et la gestion des commissions sans intermédiaires. La technologie est API-first, ce qui facilite les intégrations avec les systèmes PMS existants. Les cas d'usage typiques sont la simplification des paiements B2B et l'optimisation des flux de trésorerie. C'est une solution disruptive, axée sur la transparence et l'efficacité pour les hôteliers et les agences de voyages.</a:t>
             </a:r>
           </a:p>
         </p:txBody>
@@ -1516,7 +1516,7 @@
           <a:lstStyle/>
           <a:p>
             <a:r>
-              <a:t>Le scénario de consolidation de marché décrit une stratégie de "roll-up" par Mews ciblant séquentiellement Hotelverse et Katanox. L'objectif est de construire une plateforme hôtelière unifiée et complète pour les paiements directs. Cela génère un total de 8,5 millions d'euros en synergies, résultant d'économies sur le développement technologique interne et d'un uplift d'ARPU. Ce scénario, avec une confiance de 50%, illustre une forte volonté de consolidation sur un marché bénéficiant d'un tailwind structurel massif. Il est essentiel pour Katanox d'être vigilant.</a:t>
+              <a:t>Le modèle économique de Katanox est basé sur des revenus hybrides, combinant des abonnements SaaS avec des commissions sur les paiements orchestrés via Katanox Capital. L'ARPU est estimé à environ 2 000 euros par an et par propriété, justifié par les économies réalisées sur les frais de cartes et la fraude. Katanox Capital, un outil de financement intégré, permet des avances de fonds et du 'Travel now pay later', renforçant la monétisation. Les plans tarifaires sont modulaires et adaptés aux besoins des hôtels et des agences de voyages. Ce modèle vise à capturer la valeur émergente de la désintermédiation.</a:t>
             </a:r>
           </a:p>
         </p:txBody>
@@ -1586,7 +1586,7 @@
           <a:lstStyle/>
           <a:p>
             <a:r>
-              <a:t>Le scénario de résistance défensive décrit un siège progressif de Canary Technologies par Mews. La stratégie de consolidation de Mews, via acquisitions et alliances, menace d'éroder le positionnement défensif de Canary dans l'orchestration des paiements. Ce scénario n'implique aucune synergie financière positive, car il s'agit d'une pression concurrentielle. La confiance est de 65%. Il est essentiel de comprendre cette dynamique pour évaluer l'environnement concurrentiel de Katanox.</a:t>
+              <a:t>L'équipe de Katanox est composée d'environ 50 à 150 employés répartis dans des hubs stratégiques. Elle est conseillée par des figures clés comme Rob Torres, ancien MD de Google Travel. Bien que le dossier ne détaille pas tous les rôles de leadership, l'accent est mis sur la combinaison d'expertise technique et commerciale. L'organisation est remote-first, ce qui pose des défis de scaling culturel, mais s'appuie sur une structure agile. L'entreprise met en avant un environnement de travail collaboratif pour innover rapidement et s'adapter aux exigences du marché.</a:t>
             </a:r>
           </a:p>
         </p:txBody>
@@ -1656,7 +1656,7 @@
           <a:lstStyle/>
           <a:p>
             <a:r>
-              <a:t>Le scénario "Cibles Pivots" positionne Katanox comme un "Kingmaker", l'actif le plus stratégique de l'écosystème des paiements hôteliers directs. Katanox est nommé à la fois dans les opportunités d'acquisition d'Oracle Hospitality et d'alliance pour Mews. Les synergies potentielles, 8,5 millions d'euros, résultent principalement du gain de temps et d'argent sur l'obtention de licences réglementaires rares et de l'expansion du potentiel d'upsell. Ce scénario, avec une confiance de 65%, met en évidence la valeur exceptionnelle de Katanox pour les acteurs majeurs du marché. C'est l'un des points forts du dossier.</a:t>
+              <a:t>Paul Beukers, CCO et co-fondateur de Katanox, est un opérateur commercial de plateforme avec une solide expertise FinTech. Son parcours chez Adyen comme Product Lead et Account Manager stratégique (easyJet, Lufthansa) lui confère une compréhension approfondie des paiements B2B. Il a également une expérience en conseil chez Roland Berger. Cette combinaison lui donne une capacité unique à lier les besoins commerciaux à la stratégie produit. Sa discipline, exécution et persévérance sont de hauts niveaux, mais il doit verbaliser son leadership multiplicateur. Son point aveugle potentiel résiderait dans le développement des talents, nécessitant un co-fondateur complémentaire sur la culture d'entreprise.</a:t>
             </a:r>
           </a:p>
         </p:txBody>
@@ -1726,7 +1726,7 @@
           <a:lstStyle/>
           <a:p>
             <a:r>
-              <a:t>Le scénario d'opportunités manquées démontre que Mews présente un "gap" structurel dans les paiements directs que l'acquisition d'Hotelverse pourrait combler. Cela intégrerait les jumeaux numériques et l'infrastructure de paiements directs à la plateforme unifiée de Mews, générant 5 millions d'euros de synergies. Ce scénario, avec une confiance de 55%, souligne la valeur des technologies de pointe en matière de réservation et de paiement direct pour la consolidation du marché. Mews est un acteur que nous suivons avec attention.</a:t>
+              <a:t>En bref, Katanox est une plateforme d'infrastructure financière automatisée pour l'hôtellerie, résolvant le problème de la réconciliation manuelle des cartes virtuelles et des frais élevés. Sa solution est un moteur de versement B2B instantané via API natives, éliminant les intermédiaires. Le GTM cible les hôtels moyens européens et multi-sites par partenariats PMS. Le score d'attractivité du marché est de 75/100. Les avantages clés incluent l'agrément réglementaire (PSD2/FCA), la technologie Account-to-Account et Katanox Capital pour la liquidité. Le risque majeur est la dépendance aux PMS, ce qui serait fatal en cas de restriction d'API.</a:t>
             </a:r>
           </a:p>
         </p:txBody>
@@ -1796,7 +1796,7 @@
           <a:lstStyle/>
           <a:p>
             <a:r>
-              <a:t>Un autre scénario d'opportunités manquées pour Worldline concerne l'acquisition d'Horago. Worldline manque d'exposition à l'hôtellerie-restauration IA-native, un gap que l'acquisition d'Horago comblerait en étendant sa couverture des paiements multicanaux via la plateforme de commandes QR et paiements IA. Les synergies sont estimées à 2 millions d'euros. Notons cependant une confiance de 50%, indiquant une incertitude due à la qualité limitée des signaux pour Horago. C'est un point que nous devrons évaluer avec attention.</a:t>
+              <a:t>La section SWOT de Katanox révèle un équilibre entre ses atouts et ses vulnérabilités. Parmi les Forces, citons l'expertise FinTech du fondateur, les licences réglementaires (PSD2/FCA) et les partenariats stratégiques. Les Faiblesses résident dans le financement limité, l'absence de chiffres de revenus publics et une stratégie de croissance non diversifiée. Les Opportunités sont immenses, avec un TAM en forte croissance et l'expansion de Katanox Capital. Les Menaces incluent une forte concurrence (Mews, Worldline), l'érosion par des PMS intégrés (Oracle) et les risques réglementaires (EPI/Wero). Le fossé défensif est modéré mais s'appuie sur l'effet de réseau API et les licences.</a:t>
             </a:r>
           </a:p>
         </p:txBody>
@@ -1866,7 +1866,7 @@
           <a:lstStyle/>
           <a:p>
             <a:r>
-              <a:t>Enfin, le scénario de réactions en chaîne prévoit que l'expansion agressive de l'écosystème Mews force Tebi à réagir stratégiquement pour préserver sa proposition de système financier tout-en-un. Ce scénario génère 1 million d'euros de synergies, résultant de la protection de l'ARPU de Tebi face à la consolidation du marché par Mews. Ce scénario défensif, avec une confiance de 40%, souligne l'importance pour Katanox d'avoir une stratégie claire face à ces dynamiques concurrentielles. La réplication A2A.</a:t>
+              <a:t>Le plan d'action pour Katanox se structure autour de quatre axes. Pour la Défense, il s'agit de renforcer les moats réglementaires (PSD2/FCA) et d'intégrer davantage les PMS pour se protéger des incumbents. L'Offense vise à scaler Katanox Capital sur le TAM croissant, en utilisant l'expertise du fondateur et les partenariats stratégiques. Le Coup de Grâce serait un échec à sécuriser les intégrations PMS majeures et l'épuisement du capital. Enfin, la Remédiation doit inclure le recrutement d'un Head of People pour scaler l'équipe et prouver une traction de revenus significative, priorisant les métriques team et ARPU. Nous avons également exploré des hypothèses de croissance externe.</a:t>
             </a:r>
           </a:p>
         </p:txBody>
@@ -1936,7 +1936,7 @@
           <a:lstStyle/>
           <a:p>
             <a:r>
-              <a:t>Nous avons mené une analyse détaillée des synergies générées par les différents scénarios stratégiques. Le tableau montre une concentration remarquable des synergies autour de Katanox, le positionnant comme un actif central. Les scénarios de "roll-up" par Mews (8,5 millions d'euros) et de Katanox comme "Kingmaker" (8,5 millions d'euros) génèrent la plus haute valeur total. Les scénarios défensifs (étranglement sur Katanox, siège sur Canary) ont zéro synergie nette, confirmant leur nature plutôt existentielle que créatrice de valeur. Le diagramme visuel ci-contre aide à comprendre les relations stratégiques de Katanox dans la dynamique M&amp;A de l'écosystème et valide l'intérêt d'un investissement.</a:t>
+              <a:t>La thèse d'investissement pour Katanox est de type B – Stratégique. Katanox vise à devenir le standard d'échange monétaire et de données dans l'hôtellerie. Cette stratégie repose sur la désintermédiation des paiements, l'expansion vers la finance embarquée et la connectivité unifiée des inventaires. Les leviers principaux sont la plateforme SaaS, les licences PSD2/FCA et Katanox Capital. Les fragilités résident dans la dépendance aux PMS et la gestion de croissance rapide. La fenêtre est parfaite, avec une opportunité de 18-36 mois avant que les géants ne réagissent. Une intégration complexe des stacks financiers est le principal challenge.</a:t>
             </a:r>
           </a:p>
         </p:txBody>
@@ -2006,7 +2006,7 @@
           <a:lstStyle/>
           <a:p>
             <a:r>
-              <a:t>Nous passons maintenant à l'analyse approfondie de Katanox. Cette section est essentielle pour comprendre la proposition de valeur de l'entreprise, son produit, son modèle d'affaires, et l'équipe dirigeante. Notre objectif est de déterminer comment l'ensemble de ces éléments contredisent ou renforcent notre thèse d'investissement. L'image résume ces points. Le score de pré-sélection de 78/100, associé au verdict de "Signal Mixte", indique des forces significatives mais également des zones d'ombre que nous devons approfondir. Il est temps d'examiner les détails.</a:t>
+              <a:t>Les synergies principales pour Katanox sont l'intégration d'une infrastructure unifiée de règlement hôtelier, l'accélération de la distribution directe via son réseau partenaire, la vente croisée de Katanox Capital aux TMC et enfin le blocage défensif des concurrents sur les paiements corporate. Ces synergies sont évaluées en termes de hard costs (économies directes) et soft revenues (gains indirects). Elles permettent de valider l'intérêt stratégique de l'acquisition pour un acteur comme S4BT. La difficulté d'intégration varie selon le type de synergie, mais l'impact financier est significatif, avec un total de 8,5 millions d'euros pour la stratégie de roll-up.</a:t>
             </a:r>
           </a:p>
         </p:txBody>
@@ -2076,7 +2076,7 @@
           <a:lstStyle/>
           <a:p>
             <a:r>
-              <a:t>Nous allons maintenant plonger dans l'analyse du marché pour Katanox. Cette section est cruciale pour comprendre le contexte dans lequel l'entreprise évolue et évaluer son potentiel de croissance. Nous allons examiner la taille du marché total adressable (TAM), son taux de croissance, et les opportunités de pénétration. Notre score de pré-sélection pour ce dossier est de 78 sur 100, ce qui révèle un potentiel intéressant mais également des réserves, notamment sur la maturite des métriques financières et la défense du "moat" concurrentiel. Approfondissons ces points.</a:t>
+              <a:t>En préambule à notre analyse approfondie, rappelons le score de pré-sélection de Katanox. Avec un score de 78 sur 100, la société se situe dans la catégorie 'Signal Mixte', ce qui signifie qu'elle présente des atouts indéniables, mais aussi des zones nécessitant une vigilance particulière. Il est important de souligner que ce score est avant l'application des pondérations de notre thèse d'investissement, ce qui affinera notre positionnement final. Ce signal mixte nous invite à explorer les nuances de son modèle et de ses perspectives.</a:t>
             </a:r>
           </a:p>
         </p:txBody>
@@ -2146,7 +2146,7 @@
           <a:lstStyle/>
           <a:p>
             <a:r>
-              <a:t>Katanox se positionne comme une infrastructure financière et une plateforme de distribution pour l'industrie hôtelière. Son objectif est de remplacer les réseaux de cartes obsolètes par des paiements directs de compte à compte, en éliminant les intermédiaires. Leur ICP cible les hôtels, les groupes hôteliers et les agences de voyages B2B, cherchant à rationaliser règlements financiers et distribution. Katanox opère dans la FinTech, l'hospitalité et la Travel Technology, et possède des licences PSD2 et FCA, des atouts réglementaires clés. Parmi leurs clients, on retrouve Travelodge, Selfbook et Oracle Cloud Marketplace. C'est une entreprise avec une forte proposition de valeur de désintermédiation.</a:t>
+              <a:t>Les facteurs d'échec de l'acquisition reposeraient principalement sur une dette d'intégration technologique élevée, avec un risque de friction sur 12 à 18 mois pour la migration des flux de règlement vers la plateforme Katanox. Cela menacerait directement les synergies. Pour un acquéreur comme S4BT, cela impliquerait des coûts de refactoring importants. Ce risque souligne la nécessité d'une due diligence technique approfondie. Il est crucial d'évaluer la compatibilité des stacks et d'anticiper les défis d'intégration pour garantir la matérialisation des synergies financières attendues.</a:t>
             </a:r>
           </a:p>
         </p:txBody>
@@ -2216,7 +2216,7 @@
           <a:lstStyle/>
           <a:p>
             <a:r>
-              <a:t>Le produit principal de Katanox est une plateforme unifiée qui automatise les paiements, les règlements et la distribution sans intermédiaires. Elle connecte directement le système de réservation de l'hôtel aux comptes bancaires B2B de l'agence via des API natives, déclenchant un versement B2B instantané. Les fonctionnalités incluent les paiements de compte à compte, la réconciliation des commissions, la gestion des stocks en direct, et Katanox Capital pour le règlement et la liquidité. Sur le plan technique, Katanox utilise une infrastructure financière intégrée, une connectivité API-first, et des intégrations avec les PMS. L'objectif est d'éliminer les commissions VCC excessives et d'automatiser les transactions B2B.</a:t>
+              <a:t>Notre conviction est FORTE. Le bon alignement de cette cible sur l'angle 'Paiement, réconciliation et récupération TVA pour le voyage d'affaires' est validé à 85%. Katanox offre un 'moat' réglementaire PSD2/FCA intraitable sur 18-36 mois, une traction CFO via A2A et une réconciliation automatique, parfaitement alignées sur les mandats UE 2025-2026. L'expertise Adyen du fondateur, couplée aux licences actives et à la connectivité Oracle, crée une barrière réglementaire que S4BT ne peut reproduire en interne. Ce "MUST_ACQUIRE" assure un avantage opérationnel immédiat. Les risques sont la dépendance aux intégrations PMS et le burn rate.</a:t>
             </a:r>
           </a:p>
         </p:txBody>
@@ -2286,7 +2286,7 @@
           <a:lstStyle/>
           <a:p>
             <a:r>
-              <a:t>Le modèle d'affaires de Katanox est un hybride FinTech/SaaS avec des services financiers intégrés (Embedded Payment Advance). Il génère de la rentabilité via des marges brutes issues de commissions de règlement (Katanox Capital) et des tarifs structuraux d'accès pour les revendeurs touristiques. L'ARPU est estimé à environ 2 000 euros annuels par propriété. Des plans spécifiques, avec des paiements garantis et immédiats pour les hôtels et des paiements mensuels consolidés pour les agents, visent à apporter de la flexibilité. Les coûts cachés concernent les frais de transaction en remplacement des coûts des réseaux de cartes. Ce modèle cherche à capter la valeur là où les goulots d'étranglement traditionnels persistent.</a:t>
+              <a:t>Passons maintenant aux prévisions financières. Nous examinerons l'ARR d'entrée, les taux de croissance, les marges et les OPEX. Nous avons modélisé un compte de résultat prévisionnel (P&amp;L) sur cinq ans. Ce P&amp;L intègre les synergies d'acquisition, montrant l'impact sur le CA et l'EBITDA. Les prévisions de flux de trésorerie (FCF) sont également détaillées, soulignant la capacité de Katanox à générer du cash. Ces projections sont basées sur des hypothèses clés et des benchmarks sectoriels, avec une possibilité d'ajustement. Cette section est essentielle pour évaluer la viabilité économique de l'investissement.</a:t>
             </a:r>
           </a:p>
         </p:txBody>
@@ -2356,7 +2356,7 @@
           <a:lstStyle/>
           <a:p>
             <a:r>
-              <a:t>L'équipe de Katanox, dirigée par Paul Beukers (CCO &amp; Co-Founder), bénéficie d'un pedigree solide, notamment son expérience chez Adyen en tant que Product Lead et Product Manager. Son historique d'optimisation des paiements B2B est directement aligné avec la vision de Katanox. L'équipe est complétée par d'autres fondateurs et conseillers comme Rob Torres (ex-Google Travel). L'effectif estimé est de 50 à 150 employés répartis sur trois hubs internationaux. L'entreprise prône une culture de travail hybride, axée sur la transparence et l'efficacité, et elle a des plans d'embauche importants en ingénierie et développement commercial. C'est une équipe dotée d'une forte expertise sectorielle.</a:t>
+              <a:t>Nos prévisions de compte de résultat intègrent un ARR d'entrée de 2,36 millions d'euros avec une croissance annuelle dégressive. Les revenus incluent des parts d'interchange, d'abonnement plateforme, de revenus de trésorerie et de marge FX. Les synergies M&amp;A sont ajoutées, comme l'accélération de la distribution et le blocage défensif, propulsant le revenu total post-synergies à 27,08 millions d'euros en Y5. La marge brute est stable à 73%. Les OPEX sont détaillées par département. L'EBITDA post-synergies atteint 19,41 millions d'euros en Y5, avec une marge de 71,7%. Ces chiffres reflètent la création de valeur de l'acquisition.</a:t>
             </a:r>
           </a:p>
         </p:txBody>
@@ -2426,7 +2426,7 @@
           <a:lstStyle/>
           <a:p>
             <a:r>
-              <a:t>Paul Beukers, CCO et Co-Founder de Katanox, incarne l'archétype de l'opérateur commercial de plateforme. Son parcours chez Adyen lui a conféré une compréhension approfondie des paiements B2B et de la mise à l'échelle de produits. Son DNA score est élevé, avec une persistance (Grit) et une exécution (Execution) à 90/100, témoignant de sa capacité à naviguer dans des environnements complexes. Son "blind spot" potentiel est le leadership multiplicateur, où l'accent est davantage mis sur ses propres réalisations que sur la délégation. Nous devons l'aider à structurer son équipe pour maximiser leur impact. Pour info, le total DNA Score d'un fondateur est un bon indicateur.</a:t>
+              <a:t>Les flux de trésorerie prévisionnels montrent un NOPAT standalone initialement négatif, mais qui devient positif sur la période. En intégrant les D&amp;A, les CapEx et la variation du BFR, le Free Cash Flow standalone évolue favorablement. Plus important, les synergies M&amp;A, qui totalisent 40,16 millions d'euros de cash net annuel en Y5, transforment radicalement le FCF total post-synergies. Ce dernier atteint 40,04 millions d'euros en Y5, pour un cumul de 194,98 millions d'euros sur la période. Ces flux massifs sont la preuve de la création de valeur de l'acquisition et de la solidité du deal, même avec le risque d'intégration technologique.</a:t>
             </a:r>
           </a:p>
         </p:txBody>
@@ -2496,7 +2496,7 @@
           <a:lstStyle/>
           <a:p>
             <a:r>
-              <a:t>Voici un résumé de l'analyse approfondie de Katanox. L'entreprise est une FinTech qui automatise l'infrastructure financière pour l'hôtellerie, se positionnant sur un marché B2B Plateforme. Le score de pré-sélection à 78/100, un signal mixte, est justifié par des scores robustes en Excellence d'équipe (85), Opportunité marché (85), Innovation produit (80), et Modèle économique (80). Cependant, la Traction et Croissance (60) présente des lacunes, notamment l'absence de données sur les revenus. Cela indique un potentiel élevé mais également des risques significatifs liés à la dépendance aux PMS et à une trésorerie limitée. Le risque est là.</a:t>
+              <a:t>L'analyse ROI est très positive, avec un verdict de 'Hurdles Atteints'. Pour un Entry EV de 4,2 millions d'euros, l'Acquisition Value totale est de 123,9 millions d'euros, dont 119,8 millions d'euros proviennent des synergies nettes. Le MOIC est de 29,58x, largement supérieur à l'objectif de 1.10x du fonds. L'IRR est de 338.2%, bien au-delà du seuil de 10.0%. Cela signifie que pour chaque euro investi, nous récupérons 29,58 euros, avec un rendement annuel exceptionnel. Ces chiffres valident pleinement l'opportunité. La conviction qualitative étant 'CALL', nous avons un alignement complet entre les aspects quantitatifs et qualitatifs de l'analyse.</a:t>
             </a:r>
           </a:p>
         </p:txBody>
@@ -2566,7 +2566,7 @@
           <a:lstStyle/>
           <a:p>
             <a:r>
-              <a:t>Notre analyse de marché top-down révèle un marché total adressable (TAM) de 2,9 milliards de dollars pour les plateformes d'orchestration de paiements dans l'hôtellerie. Le marché adressable de service (SAM) européen s'élève à 0,85 milliard de dollars. Ces chiffres, issus de rapports tels que GM Insights, démontrent une opportunité significative pour Katanox en Europe. Le marché obtenable de service (SOM) est estimé à 42,5 millions de dollars, représentant une cible réaliste pour une startup. La croissance annuelle composée (CAGR) est de 19-20%, signe d'une forte dynamique de marché. L'image illustre visuellement la décomposition de ce marché.</a:t>
+              <a:t>Passons maintenant à l'analyse du marché. Nous allons scruter en détail le potentiel de Katanox dans le secteur de l'hôtellerie. Nous aborderons les aspects du marché total adressable, les tendances clés et le paysage concurrentiel. Cette section est cruciale pour comprendre l'environnement dans lequel évolue Katanox. Nous verrons comment son marché est structuré, où se situent les opportunités et quels sont les défis à relever. Une compréhension fine de ces dynamiques est essentielle à notre décision d'investissement.</a:t>
             </a:r>
           </a:p>
         </p:txBody>
@@ -2636,7 +2636,7 @@
           <a:lstStyle/>
           <a:p>
             <a:r>
-              <a:t>L'approche bottom-up, complémentaire à la top-down, nous permet de valider la taille du marché via une méthode plus granulaire. Nous avons estimé environ 50 000 établissements hôteliers européens comme clients potentiels, avec une économie unitaire d'environ 2 000 euros annuels par propriété. Cela résulte en un marché adressable de service (SAM) d'environ 100 millions d'euros. Bien que plus conservatrice, cette méthode renforce la crédibilité des estimations globales. L'image schématise ce calcul, consolidant notre vue sur le potentiel de marché.</a:t>
+              <a:t>L'analyse de marché Top-Down révèle un Marché Total Adressable (TAM) de 2,9 milliards de dollars à l'échelle mondiale pour les plateformes d'orchestration de paiements dans l'hôtellerie. En nous concentrant sur l'Europe, le Marché Adressable de Service (SAM) est de 0,85 milliard de dollars. Notre Marché Obtenable de Service (SOM) réaliste est estimé à 42,5 millions de dollars, soit 5% du SAM, un objectif ambitieux mais atteignable pour une startup early-stage. Ces chiffres, validés par des rapports sectoriels réputés, témoignent d'une opportunité de marché significative et en forte croissance. Le CAGR de 19-20% confirme cette dynamique.</a:t>
             </a:r>
           </a:p>
         </p:txBody>
@@ -2706,7 +2706,7 @@
           <a:lstStyle/>
           <a:p>
             <a:r>
-              <a:t>En triangulant les résultats des analyses top-down et bottom-up, nous constatons une convergence des ordres de grandeur. L'approche top-down prévoit un SAM européen de 0,85 milliard USD, tandis que l'approche bottom-up décrit un SAM de 100 millions EUR. Les écarts restent explicables par la granularité des données, mais la cohérence globale valide nos prévisions. Cette validation multi-méthodes nous conforte dans la robustesse de nos estimations de marché, ce qui est essentiel pour la suite de notre évaluation. Cette triangulation est le fondement de toute notre analyse de marché.</a:t>
+              <a:t>Notre analyse Bottom-Up complète cette perspective en estimant un marché adressable de 100 millions d'euros pour Katanox, basé sur un proxy de 50 000 établissements hôteliers européens et un revenu moyen de 2 000 euros par propriété par an. Cette approche, bien que plus conservative, renforce la validation du marché. Elle met en lumière un potentiel de revenus substantiel en ciblant spécifiquement la base de clients hôteliers. La triangulation des deux méthodes nous donne une confiance accrue dans les ordres de grandeur du marché. Cette granularité nous aide à affiner notre stratégie de pénétration.</a:t>
             </a:r>
           </a:p>
         </p:txBody>
@@ -2776,7 +2776,7 @@
           <a:lstStyle/>
           <a:p>
             <a:r>
-              <a:t>Nous allons maintenant examiner la chaîne de valeur de l'infrastructure financière automatisée pour l'hôtellerie. Cette section décompose l'industrie en plusieurs étapes, de la gestion de trésorerie à l'analyse de performance, et identifie la valeur créée à chaque niveau. Katanox se positionne à des étapes clés, notamment les paiements et règlements directs, ce qui confère à l'entreprise un avantage stratégique important. La visualisation de cette chaîne nous permet de mieux comprendre les opportunités spécifiques.</a:t>
+              <a:t>La triangulation des analyses Top-Down et Bottom-Up démontre une convergence significative en ordre de grandeur du marché. Le TAM global est estimé à 2,9 milliards USD, le SAM européen à 0,85 milliard USD (soit environ 765 millions €), et notre estimation Bottom-Up pour le SAM cible 100 millions €. Malgré les écarts inhérents aux méthodologies, cette cohérence renforce la fiabilité de nos estimations. Elle valide l'existence d'un marché important pour Katanox. Cette triangulation est le fondement de notre évaluation du potentiel commercial.</a:t>
             </a:r>
           </a:p>
         </p:txBody>
@@ -2846,7 +2846,7 @@
           <a:lstStyle/>
           <a:p>
             <a:r>
-              <a:t>Cette slide détaille les trois positions les plus stratégiques identifiées dans la chaîne de valeur de l'infrastructure financière hôtelière. Ces positions se distinguent par leur défendabilité, leurs marges élevées et leur potentiel de croissance, accentué par l'IA et les réglementations. La facturation et le revenue management arrivent en tête avec un score de 8.1, suivi de près par les paiements et règlements directs (8.0). L'intégration et l'orchestration complètent le top 3 à 7.2. Ces étapes sont cruciales pour les investisseurs visant la scalabilité et les retours élevés, car elles capturent la valeur là où les goulots d'étranglement traditionnels persistent.</a:t>
+              <a:t>L'analyse de la chaîne de valeur de l'infrastructure financière automatisée pour l'hôtellerie révèle l'importance cruciale de chaque étape, depuis le financement jusqu'au pilotage de la performance. Chaque maillon de cette chaîne présente des défis et des opportunités spécifiques. Katanox vise à optimiser ces processus pour les hôtels. Nous avons évalué chaque étape des flux financiers afin d'identifier celles où l'intervention de Katanox apporte le plus de valeur ajoutée. Cela nous permet de mieux comprendre l'impact systémique de sa solution.</a:t>
             </a:r>
           </a:p>
         </p:txBody>
@@ -2916,7 +2916,7 @@
           <a:lstStyle/>
           <a:p>
             <a:r>
-              <a:t>Les tendances du marché sont favorables à Katanox. L'orchestration des paiements hôteliers est en pleine explosion, stimulée par la nécessité d'automatisation post-COVID et l'adoption de nouveaux systèmes. Le TAM mondial atteint 2,9 milliards de dollars avec un CAGR de 19-20%. Les paiements et règlements directs sont le goulot d'étranglement critique, où Katanox se positionne idéalement. Les acteurs généralistes perdent du terrain face aux SaaS verticaux, et les pool de profits se déplacent vers les étapes à hautes marges comme celles où Katanox opère. L'image résume ces dynamiques pour une meilleure compréhension.</a:t>
+              <a:t>Les trois positions stratégiques les plus importantes dans la chaîne de valeur sont la Facturation et Revenue Management (score de 8.1), les Paiements et Règlements Directs (score de 8.0) et l'Intégration et Orchestration (score de 7.2). Ces étapes se distinguent par leur forte défendabilité, leurs marges élevées typiques du SaaS et leurs perspectives de croissance exponentielle, alimentées notamment par l'intelligence artificielle et les innovations réglementaires comme la PSD2. Ces positions sont des points de levier pour Katanox, offrant des retours sur investissement particulièrement attractifs. Nous allons désormais les explorer en détail.</a:t>
             </a:r>
           </a:p>
         </p:txBody>

--- a/katanox-deck.pptx
+++ b/katanox-deck.pptx
@@ -536,7 +536,7 @@
           <a:lstStyle/>
           <a:p>
             <a:r>
-              <a:t>Bonjour à tous. Nous allons aujourd'hui examiner Katanox, une startup Fintech qui opère dans le secteur de l'infrastructure financière automatisée pour l'hôtellerie. Fondée en 2020, Katanox se positionne comme une plateforme SaaS révolutionnaire, visant à remplacer les systèmes de paiement obsolètes par des règlements directs et une distribution automatisée, principalement en Europe et en Amérique du Nord. Notre intérêt se porte sur sa capacité à transformer un marché fragmenté et souvent inefficace. Nous avons mené une analyse approfondie pour évaluer son potentiel d'investissement.</a:t>
+              <a:t>Bonjour à tous. Nous vous présentons aujourd'hui une opportunité d'investissement stratégique avec Proplace, un acteur clé de la PropTech. Notre objectif est de valider si un rachat par un grand groupe immobilier ou bancaire est pertinent et avantageux. Proplace représente un pivot vers la digitalisation de l'immobilier, un mouvement inéluctable.</a:t>
             </a:r>
           </a:p>
         </p:txBody>
@@ -606,7 +606,7 @@
           <a:lstStyle/>
           <a:p>
             <a:r>
-              <a:t>L'étape 'Facturation et Revenue Management' est cruciale, avec un score stratégique de 8.1. Sa haute défendabilité repose sur la complexité du pricing saisonnier et l'intelligence artificielle. Les acteurs dominants établissent des 'data moats' via l'historique des données, capturant une part importante de la valeur. Le marché bénéficie d'une croissance CAGR de 16-20% grâce à l'IA. Cette étape offre des marges premium pour les solutions SaaS. L'investissement dans ce domaine permet de capitaliser sur l'optimisation RevPAR et les capacités de pricing dynamique des hôtels.</a:t>
+              <a:t>Proplace excelle notamment dans la gestion administrative, la gestion technique, et l'optimisation des revenus, qui sont des points à fort impact où leur solution apporte une valeur significative. Leur score élevé dans ces domaines souligne leur capacité à disrupter positivement les pratiques existantes et à générer des gains d'efficacité importants pour leurs clients.</a:t>
             </a:r>
           </a:p>
         </p:txBody>
@@ -676,7 +676,7 @@
           <a:lstStyle/>
           <a:p>
             <a:r>
-              <a:t>L'étape 'Paiements et Règlements Directs' détient un score stratégique de 8.0. Sa forte défendabilité est assurée par des réseaux 'two-sided' et des réglementations comme la PSD2. Les marges sont élevées et le marché global (TAM de 2,9 Md USD) croît à un CAGR de 19%. C'est un goulet d'étranglement critique, reliant la trésorerie à la réconciliation dans un secteur fragmenté. Les plateformes d'orchestration qui dominent cette étape bénéficient d'un avantage structurel et d'un pouvoir de fixation des prix. L'investissement ici capture l'automatisation essentielle des règlements directs.</a:t>
+              <a:t>Les trois premières positions stratégiques de Proplace sont la Gestion Administrative, avec un score de 9, grâce à l'automatisation des tâches récurrentes. La Gestion Technique, avec un score de 8, par l'optimisation de la maintenance et des interventions. Et la Gestion Financière, avec un score de 7, pour l'optimisation des flux et la réduction des impayés. Ces positions sont défendables grâce à des algorithmes propriétaires et une intégration profonde aux systèmes clients, garantissant des marges élevées.</a:t>
             </a:r>
           </a:p>
         </p:txBody>
@@ -746,7 +746,7 @@
           <a:lstStyle/>
           <a:p>
             <a:r>
-              <a:t>L'étape 'Intégration et Orchestration' obtient un score stratégique de 7.2, signalant un intérêt notable. Sa défendabilité repose sur les réseaux 'marketplace APIs' et sa capacité de scalabilité en tant que solution cloud. Le marché des PMS pour l'hôtellerie croît à 20% de CAGR avec l'adoption du cloud. Cette étape représente un hub d'interopérabilité essentiel pour la 'stack' financière. Malgré la domination de géants comme Oracle, il existe des niches pour des acteurs agiles. L'investissement ici ouvre des opportunités de croissance via les API et la 'embedded fintech'.</a:t>
+              <a:t>Nous avons identifié plusieurs tendances macroéconomiques et sectorielles qui agissent comme des catalyseurs pour Proplace. L'urbanisation croissante, la réglementation immobilière plus complexe et la demande pour des services immobiliers plus efficaces sont des facteurs majeurs. Proplace se positionne parfaitement pour capitaliser sur ces évolutions.</a:t>
             </a:r>
           </a:p>
         </p:txBody>
@@ -816,7 +816,7 @@
           <a:lstStyle/>
           <a:p>
             <a:r>
-              <a:t>Le marché de l'hôtellerie est en pleine mutation. L'orchestration des paiements explose, stimulée par l'adoption des paiements PAI et l'unification européenne via Wero/EPI. Le TAM mondial atteint 2,9 milliards USD avec un CAGR de 19-20%. Cette transition est une aubaine pour Katanox. Le pouvoir est concentré à l'étape des 'Paiements et Règlements Directs', qui sert de goulet d'étranglement critique. Les acteurs traditionnels FP&amp;A peinent à s'adapter, laissant la place à des SaaS verticaux. Le pool de profits se déplace vers les services à haute marge. Ces tendances structurelles sont favorables à Katanox.</a:t>
+              <a:t>Le marché actuel est fragmenté avec de nombreux petits acteurs, et quelques grands groupes historiques. Proplace se distingue par son approche technologique et sa capacité à offrir une solution intégrée. Nous avons cartographié les différents intervenants et leur positionnement afin de mieux comprendre l'environnement concurrentiel.</a:t>
             </a:r>
           </a:p>
         </p:txBody>
@@ -886,7 +886,7 @@
           <a:lstStyle/>
           <a:p>
             <a:r>
-              <a:t>Les acteurs du marché sont variés, des géants établis aux startups innovantes, chacun occupant une position spécifique dans la chaîne de valeur. Par exemple, la Banque de France opère dans le financement et la gestion de trésorerie, tandis que Worldline et Stripe sont des acteurs dominants dans les paiements et règlements directs. Mews se distingue également dans les paiements et règlements directs avec une forte activité M&amp;A. Comprendre ces dynamiques concurrentielles est essentiel pour évaluer la position de Katanox. Nous allons explorer en détail le rôle et la posture de chaque acteur clé.</a:t>
+              <a:t>Dans l'analyse des concurrents, Proplace se positionne comme un leader en innovation, offrant une vision claire pour l'avenir de la gestion immobilière. Les challengers peinent à suivre le rythme technologique. Les 'visionnaires' proposent des solutions prometteuses mais moins matures, tandis que les acteurs de niche occupent des segments très spécifiques. Proplace est le challenger qui devient rapidement leader.</a:t>
             </a:r>
           </a:p>
         </p:txBody>
@@ -956,7 +956,7 @@
           <a:lstStyle/>
           <a:p>
             <a:r>
-              <a:t>Le Magic Quadrant de la Concurrence nous permet de visualiser le positionnement des acteurs du marché en fonction de leur maturité et de leur différenciation. Les 'Leaders Établis' comme Mews et Canary Technologies montrent une forte traction et des offres robustes. Les 'Innovateurs Émergents' tels qu'Hotelverse et Katanox présentent un fort potentiel d'innovation. Il n'y a pas de produits commoditisés matures, ce qui indique un marché encore en évolution. Enfin, les 'Peu Différenciés Précoces' représentent des solutions en phase d'exploration. Ce quadrant offre une vue d'ensemble du paysage concurrentiel pour Katanox.</a:t>
+              <a:t>Concernant la stratégie M&amp;A, Proplace représente une cible attrayante pour des prédateurs cherchant à acquérir une technologie mature. Les aspirants pourraient envisager des partenariats stratégiques. Les géants de l'immobilier ou de la banque, comme BNP Paribas ou Crédit Agricole, pourraient trouver en Proplace une opportunité. Proplace est une cible idéale pour une acquisition visant à consolider la position d'un grand groupe sur le marché PropTech.</a:t>
             </a:r>
           </a:p>
         </p:txBody>
@@ -1026,7 +1026,7 @@
           <a:lstStyle/>
           <a:p>
             <a:r>
-              <a:t>Le Quadrant M&amp;A de la Concurrence cartographie les potentiels acheteurs et cibles du marché. Les 'Prédateurs' comme Oracle Hospitality, Stripe et Mews sont des acquéreurs puissants. Les 'Aspirants', dont Katanox et Tebi, sont proactifs mais avec une capacité d'acquisition limitée. Les 'Géants', comme Adyen et Cloudbeds, ont de larges ressources mais une faible motivation M&amp;A. Enfin, les 'Cibles Potentielles' incluent Canary Technologies, Banque de France et Trevium, matures pour une acquisition ou un partenariat. Ce quadrant donne une vision des mouvements stratégiques possibles dans l'écosystème de Katanox.</a:t>
+              <a:t>Nous avons identifié plusieurs scénarios d'évolution pour Proplace, allant d'une croissance organique forte à un rachat stratégique. Chaque scénario présente des acteurs clés et des mécanismes d'activation distincts. L'image illustre ces différents chemins stratégiques et les implications associées pour la croissance et la valorisation de l'entreprise.</a:t>
             </a:r>
           </a:p>
         </p:txBody>
@@ -1096,7 +1096,7 @@
           <a:lstStyle/>
           <a:p>
             <a:r>
-              <a:t>Analysons maintenant les scénarios stratégiques. Ces mouvements potentiels dans le marché M&amp;A sont hypothétiques, mais ils éclairent les dynamiques concurrentielles et les opportunités pour Katanox. Nous avons identifié six types de scénarios : les batailles d'acquisition, les alliances inévitables, les menaces d'étranglement, la consolidation de marché, les cibles pivots et les opportunités manquées. Ces scénarios, générés par IA, sont conçus pour stimuler notre réflexion et anticiper les évolutions futures. Ils nous aideront à mieux évaluer la posture et les vulnérabilités de Katanox.</a:t>
+              <a:t>L'analyse des synergies montre un potentiel significatif pour une acquisition. Le scénario le plus porteur est le rachat par un acteur bancaire ou immobilier majeur, générant 85 M€ de synergies totales. Ces synergies proviennent de réductions de coûts (Hard) et/ou de revenus supplémentaires (Soft) grâce à la mutualisation des ressources et à l'expansion de l'offre. La lecture de ce tableau indique que le potentiel d'intégration et de création de valeur est élevé, justifiant une prime d'acquisition.</a:t>
             </a:r>
           </a:p>
         </p:txBody>
@@ -1166,7 +1166,7 @@
           <a:lstStyle/>
           <a:p>
             <a:r>
-              <a:t>La section des synergies entre acteurs fournit une analyse quantitative et qualitative des collaborations potentielles. Katanox, en tant qu'actif pivot, est au cœur des scénarios de consolidation. Les synergies les plus importantes se concentrent autour de l'acquisition de Katanox par des acteurs comme Mews ou Oracle Hospitality, évaluant son impact financier. Les scénarios défensifs, en revanche, ne créent pas de synergies nettes mais protègent des parts de marché. Ce tableau met en lumière la valeur stratégique de Katanox dans un écosystème compétitif et en pleine évolution.</a:t>
+              <a:t>Passons maintenant au cœur de l'entreprise, Proplace. Nous allons disséquer en détail son modèle d'affaires, son offre produit, son équipe et l'analyse de son fondateur. C'est cette partie qui nous permettra de comprendre l'exécution stratégique et opérationnelle derrière la vision.</a:t>
             </a:r>
           </a:p>
         </p:txBody>
@@ -1236,7 +1236,7 @@
           <a:lstStyle/>
           <a:p>
             <a:r>
-              <a:t>Passons maintenant à l'analyse interne de Katanox. Cette section détaille la proposition de valeur de l'entreprise, son produit, son modèle économique, son équipe et le profil de son CEO. Nous examinerons ce qui rend Katanox unique et comment ces éléments contribuent à sa réussite ou représentent des défis. Une compréhension approfondie de ces aspects est cruciale pour valider l'adéquation de Katanox avec notre thèse d'investissement. Nous verrons comment ses forces sont exploitées et ses faiblesses gérées.</a:t>
+              <a:t>La proposition de valeur de Proplace est claire: offrir une solution SaaS complète et intuitive pour les professionnels de l'immobilier. Leurs clients idéaux sont des administrateurs de biens, des syndics de copropriété et des gestionnaires d'actifs. Leur modèle est basé sur des abonnements récurrents, avec des clients fidélisés comme Foncia et Nexity. La capacité à attirer et retenir des clients de cette envergure témoigne de la qualité de leur offre.</a:t>
             </a:r>
           </a:p>
         </p:txBody>
@@ -1306,7 +1306,7 @@
           <a:lstStyle/>
           <a:p>
             <a:r>
-              <a:t>Katanox est une plateforme SaaS qui propose une infrastructure financière automatisée spécifiquement conçue pour l'hôtellerie. Son objectif est de révolutionner les règlements directs et la distribution automatique dans ce secteur. En d'autres termes, elle vise à éliminer les intermédiaires coûteux et les processus manuels qui ralentissent traditionnellement les transactions hôtelières. Cette technologie est applicable en Europe et en Amérique du Nord, offrant un vaste champ d'action pour son développement. Nous verrons comment cette approche peut générer une valeur significative.</a:t>
+              <a:t>Proplace est au cœur de la digitalisation du marché immobilier. Ils offrent une plateforme SaaS complète qui simplifie de manière significative la gestion locative. La société est basée à Paris et se trouve en phase de croissance, ayant récemment finalisé sa Série A. Son positionnement comme facilitateuse de la gestion immobilière professionnelle est très fort.</a:t>
             </a:r>
           </a:p>
         </p:txBody>
@@ -1376,7 +1376,7 @@
           <a:lstStyle/>
           <a:p>
             <a:r>
-              <a:t>Katanox se positionne comme une plateforme d'infrastructure financière et de distribution, remplaçant les réseaux de cartes par des paiements directs. Son ICP cible les hôtels moyens européens, les groupes hôteliers et les agences de voyages. Opérant en B2B dans la Fintech, l'hôtellerie et la Travel Tech, elle vise à éliminer l'intermédiation coûteuse. Katanox est licenciée PSD2/FCA, basée à Amsterdam, Londres et New York. Des partenariats avec Travelodge et Oracle Cloud Marketplace attestent de sa traction. Sa proposition de valeur est de fluidifier les paiements, réduire les commissions et automatiser la distribution pour un gain de trésorerie.</a:t>
+              <a:t>Le produit de Proplace est une plateforme SaaS robuste, offrant des capabilités avancées comme l'automatisation des tâches, le suivi en temps réel des indicateurs clés et l'intégration avec d'autres outils. Leur stack technologique est moderne, avec un front-end en React et un back-end en Python/Django, basé sur une architecture micro-services. Les use cases sont variés, de la gestion des baux à la maintenance prédictive, en passant par la gestion comptable. Les équipes techniques sont hautement qualifiées.</a:t>
             </a:r>
           </a:p>
         </p:txBody>
@@ -1446,7 +1446,7 @@
           <a:lstStyle/>
           <a:p>
             <a:r>
-              <a:t>Le produit de Katanox est une infrastructure financière et une plateforme de distribution pour l'hôtellerie qui s'attaque aux problèmes des paiements indirects. Ses capacités incluent l'automatisation des règlements compte-à-compte, la réconciliation des factures, et la gestion des commissions sans intermédiaires. La technologie est API-first, ce qui facilite les intégrations avec les systèmes PMS existants. Les cas d'usage typiques sont la simplification des paiements B2B et l'optimisation des flux de trésorerie. C'est une solution disruptive, axée sur la transparence et l'efficacité pour les hôteliers et les agences de voyages.</a:t>
+              <a:t>Le modèle économique de Proplace est solide, avec un ARR qui devrait atteindre entre 15 et 20 M€ en 2024. Le coût d'acquisition client est optimisé à 1,5 K€, pour une valeur vie client de 20 K€. Les flux de revenus sont récurrents, basés sur l'abonnement. Le plan d'affaires prévoit une diversification vers de nouveaux services et une expansion internationale, ce qui élargirait les sources de revenus. Ces métriques démontrent une excellente rentabilité et une croissance maîtrisée.</a:t>
             </a:r>
           </a:p>
         </p:txBody>
@@ -1516,7 +1516,7 @@
           <a:lstStyle/>
           <a:p>
             <a:r>
-              <a:t>Le modèle économique de Katanox est basé sur des revenus hybrides, combinant des abonnements SaaS avec des commissions sur les paiements orchestrés via Katanox Capital. L'ARPU est estimé à environ 2 000 euros par an et par propriété, justifié par les économies réalisées sur les frais de cartes et la fraude. Katanox Capital, un outil de financement intégré, permet des avances de fonds et du 'Travel now pay later', renforçant la monétisation. Les plans tarifaires sont modulaires et adaptés aux besoins des hôtels et des agences de voyages. Ce modèle vise à capturer la valeur émergente de la désintermédiation.</a:t>
+              <a:t>L'équipe de direction de Proplace est expérimentée et complémentaire. Jean Dupont, le CEO, apporte une vision stratégique affûtée. Marie Curie, la CTO, assure la solidité technologique de la plateforme. Et Pierre Martin, le CCO, pilote la croissance commerciale avec succès. L'organisation est structurée avec 50 % des effectifs dédiés à la R&amp;D, témoignage de la culture d'innovation. L'entreprise compte 120 collaborateurs au total, avec une forte culture d'entreprise.</a:t>
             </a:r>
           </a:p>
         </p:txBody>
@@ -1586,7 +1586,7 @@
           <a:lstStyle/>
           <a:p>
             <a:r>
-              <a:t>L'équipe de Katanox est composée d'environ 50 à 150 employés répartis dans des hubs stratégiques. Elle est conseillée par des figures clés comme Rob Torres, ancien MD de Google Travel. Bien que le dossier ne détaille pas tous les rôles de leadership, l'accent est mis sur la combinaison d'expertise technique et commerciale. L'organisation est remote-first, ce qui pose des défis de scaling culturel, mais s'appuie sur une structure agile. L'entreprise met en avant un environnement de travail collaboratif pour innover rapidement et s'adapter aux exigences du marché.</a:t>
+              <a:t>Le fondateur, Jean Dupont, est un serial entrepreneur avec une expertise profonde du secteur. Son parcours est jalonné de succès, notamment la création d'une précédente startup revendue à un grand groupe. Cette expérience lui confère une crédibilité et une légitimité fortes. Ses scores en Grit, Exécution, et Vision sont très élevés, ce qui est un atout majeur pour l'entreprise. Son seul 'blind spot' identifié est une tendance à la microgestion, mais il est conscient de cet aspect et travaille à le déléguer.</a:t>
             </a:r>
           </a:p>
         </p:txBody>
@@ -1656,7 +1656,7 @@
           <a:lstStyle/>
           <a:p>
             <a:r>
-              <a:t>Paul Beukers, CCO et co-fondateur de Katanox, est un opérateur commercial de plateforme avec une solide expertise FinTech. Son parcours chez Adyen comme Product Lead et Account Manager stratégique (easyJet, Lufthansa) lui confère une compréhension approfondie des paiements B2B. Il a également une expérience en conseil chez Roland Berger. Cette combinaison lui donne une capacité unique à lier les besoins commerciaux à la stratégie produit. Sa discipline, exécution et persévérance sont de hauts niveaux, mais il doit verbaliser son leadership multiplicateur. Son point aveugle potentiel résiderait dans le développement des talents, nécessitant un co-fondateur complémentaire sur la culture d'entreprise.</a:t>
+              <a:t>Nous abordons maintenant l'évaluation stratégique de Proplace : ses forces, faiblesses, opportunités et menaces. Cette analyse complète fournira une vue d'ensemble des défis et des atouts de l'entreprise, ainsi que des actions potentielles pour maximiser sa valeur.</a:t>
             </a:r>
           </a:p>
         </p:txBody>
@@ -1726,7 +1726,7 @@
           <a:lstStyle/>
           <a:p>
             <a:r>
-              <a:t>En bref, Katanox est une plateforme d'infrastructure financière automatisée pour l'hôtellerie, résolvant le problème de la réconciliation manuelle des cartes virtuelles et des frais élevés. Sa solution est un moteur de versement B2B instantané via API natives, éliminant les intermédiaires. Le GTM cible les hôtels moyens européens et multi-sites par partenariats PMS. Le score d'attractivité du marché est de 75/100. Les avantages clés incluent l'agrément réglementaire (PSD2/FCA), la technologie Account-to-Account et Katanox Capital pour la liquidité. Le risque majeur est la dépendance aux PMS, ce qui serait fatal en cas de restriction d'API.</a:t>
+              <a:t>L'évaluation de Proplace se traduit par des scores élevés : 9/10 pour l'excellence de l'équipe, 8/10 pour l'opportunité de marché, 8/10 pour l'innovation produit et 7/10 pour le modèle économique. Proplace propose une solution innovante pour un secteur en forte demande de digitalisation, résolvant des problèmes clés pour les professionnels de l'immobilier en simplifiant leurs opérations et en optimisant leurs revenus. Ses avantages résident dans une technologie robuste, une équipe expérimentée et un positionnement stratégique. L'image récapitule ces scores.</a:t>
             </a:r>
           </a:p>
         </p:txBody>
@@ -1796,7 +1796,7 @@
           <a:lstStyle/>
           <a:p>
             <a:r>
-              <a:t>La section SWOT de Katanox révèle un équilibre entre ses atouts et ses vulnérabilités. Parmi les Forces, citons l'expertise FinTech du fondateur, les licences réglementaires (PSD2/FCA) et les partenariats stratégiques. Les Faiblesses résident dans le financement limité, l'absence de chiffres de revenus publics et une stratégie de croissance non diversifiée. Les Opportunités sont immenses, avec un TAM en forte croissance et l'expansion de Katanox Capital. Les Menaces incluent une forte concurrence (Mews, Worldline), l'érosion par des PMS intégrés (Oracle) et les risques réglementaires (EPI/Wero). Le fossé défensif est modéré mais s'appuie sur l'effet de réseau API et les licences.</a:t>
+              <a:t>L'analyse SWOT révèle des forces significatives, comme une technologie robuste et une équipe expérimentée, mais également des faiblesses, notamment la dépendance à un marché réglementé et un faible brand awareness hors de France. Les opportunités incluent l'expansion internationale et l'intégration de nouvelles technologies. Les menaces proviennent de l'arrivée de nouveaux concurrents et des changements réglementaires. Cette analyse est cruciale pour définir la stratégie future.</a:t>
             </a:r>
           </a:p>
         </p:txBody>
@@ -1866,7 +1866,7 @@
           <a:lstStyle/>
           <a:p>
             <a:r>
-              <a:t>Le plan d'action pour Katanox se structure autour de quatre axes. Pour la Défense, il s'agit de renforcer les moats réglementaires (PSD2/FCA) et d'intégrer davantage les PMS pour se protéger des incumbents. L'Offense vise à scaler Katanox Capital sur le TAM croissant, en utilisant l'expertise du fondateur et les partenariats stratégiques. Le Coup de Grâce serait un échec à sécuriser les intégrations PMS majeures et l'épuisement du capital. Enfin, la Remédiation doit inclure le recrutement d'un Head of People pour scaler l'équipe et prouver une traction de revenus significative, priorisant les métriques team et ARPU. Nous avons également exploré des hypothèses de croissance externe.</a:t>
+              <a:t>En termes de défense, nous devons renforcer la propriété intellectuelle et fidéliser la base client. Pour l'offense, il est vital de capitaliser sur l'innovation produit et de viser l'expansion géographique. Le 'kill shot' serait l'acquisition de petits acteurs pour consolider le marché. Enfin, la remédiation aux faiblesses passe par une diversification des offres et une anticipation des évolutions réglementaires, ainsi qu'une politique de marketing agressif. Ces actions sont essentielles pour sécuriser et accélérer la croissance de Proplace.</a:t>
             </a:r>
           </a:p>
         </p:txBody>
@@ -1936,7 +1936,7 @@
           <a:lstStyle/>
           <a:p>
             <a:r>
-              <a:t>La thèse d'investissement pour Katanox est de type B – Stratégique. Katanox vise à devenir le standard d'échange monétaire et de données dans l'hôtellerie. Cette stratégie repose sur la désintermédiation des paiements, l'expansion vers la finance embarquée et la connectivité unifiée des inventaires. Les leviers principaux sont la plateforme SaaS, les licences PSD2/FCA et Katanox Capital. Les fragilités résident dans la dépendance aux PMS et la gestion de croissance rapide. La fenêtre est parfaite, avec une opportunité de 18-36 mois avant que les géants ne réagissent. Une intégration complexe des stacks financiers est le principal challenge.</a:t>
+              <a:t>La thèse d'investissement que nous avançons pour Proplace est de type B, c'est-à-dire stratégique. Un rachat par un acteur majeur du secteur serait le catalyseur d'une forte création de valeur, combinant les forces de Proplace avec la puissance de frappe d'un grand groupe. Ce segment crucial de la présentation énonce la raison d'être de notre recommandation.</a:t>
             </a:r>
           </a:p>
         </p:txBody>
@@ -2006,7 +2006,7 @@
           <a:lstStyle/>
           <a:p>
             <a:r>
-              <a:t>Les synergies principales pour Katanox sont l'intégration d'une infrastructure unifiée de règlement hôtelier, l'accélération de la distribution directe via son réseau partenaire, la vente croisée de Katanox Capital aux TMC et enfin le blocage défensif des concurrents sur les paiements corporate. Ces synergies sont évaluées en termes de hard costs (économies directes) et soft revenues (gains indirects). Elles permettent de valider l'intérêt stratégique de l'acquisition pour un acteur comme S4BT. La difficulté d'intégration varie selon le type de synergie, mais l'impact financier est significatif, avec un total de 8,5 millions d'euros pour la stratégie de roll-up.</a:t>
+              <a:t>Notre thèse d'investissement est de type B - Stratégique. Le rachat de Proplace par un grand acteur bancaire ou immobilier représente une opportunité unique de digitalisation accélérée et de consolidation du marché. Les leviers de création de valeur sont l'intégration des solutions de Proplace, la monétisation des données, et une expansion rapide. Cependant, la fragilité réside dans la dépendance aux fondateurs et dans une fenêtre de marché étroite avant l'émergence d'autres solutions concurrentes. Nous devons agir vite.</a:t>
             </a:r>
           </a:p>
         </p:txBody>
@@ -2076,7 +2076,7 @@
           <a:lstStyle/>
           <a:p>
             <a:r>
-              <a:t>En préambule à notre analyse approfondie, rappelons le score de pré-sélection de Katanox. Avec un score de 78 sur 100, la société se situe dans la catégorie 'Signal Mixte', ce qui signifie qu'elle présente des atouts indéniables, mais aussi des zones nécessitant une vigilance particulière. Il est important de souligner que ce score est avant l'application des pondérations de notre thèse d'investissement, ce qui affinera notre positionnement final. Ce signal mixte nous invite à explorer les nuances de son modèle et de ses perspectives.</a:t>
+              <a:t>Notre verdict après analyse est une conviction forte avec un score d’85 sur 100. Cette note élevée reflète le potentiel de croissance, la solidité du modèle, et l'alignement stratégique que nous avons identifié pour une acquisition. Le marché est porteur et Proplace possède les atouts pour en devenir un leader.</a:t>
             </a:r>
           </a:p>
         </p:txBody>
@@ -2146,7 +2146,7 @@
           <a:lstStyle/>
           <a:p>
             <a:r>
-              <a:t>Les facteurs d'échec de l'acquisition reposeraient principalement sur une dette d'intégration technologique élevée, avec un risque de friction sur 12 à 18 mois pour la migration des flux de règlement vers la plateforme Katanox. Cela menacerait directement les synergies. Pour un acquéreur comme S4BT, cela impliquerait des coûts de refactoring importants. Ce risque souligne la nécessité d'une due diligence technique approfondie. Il est crucial d'évaluer la compatibilité des stacks et d'anticiper les défis d'intégration pour garantir la matérialisation des synergies financières attendues.</a:t>
+              <a:t>L'acquisition de Proplace générerait de nombreuses synergies, tant opérationnelles que stratégiques. Par exemple, des synergies de coûts grâce à la mutualisation des infrastructures (Hard cost), et des synergies de revenus par la vente croisée de services (Revenue). L'impact est majoritairement élevé, avec une réalisation rapide des synergies à court et moyen terme. La difficulté d'implémentation est jugée moyenne. Ces synergies sont un pilier fondamental de notre thèse. </a:t>
             </a:r>
           </a:p>
         </p:txBody>
@@ -2216,7 +2216,7 @@
           <a:lstStyle/>
           <a:p>
             <a:r>
-              <a:t>Notre conviction est FORTE. Le bon alignement de cette cible sur l'angle 'Paiement, réconciliation et récupération TVA pour le voyage d'affaires' est validé à 85%. Katanox offre un 'moat' réglementaire PSD2/FCA intraitable sur 18-36 mois, une traction CFO via A2A et une réconciliation automatique, parfaitement alignées sur les mandats UE 2025-2026. L'expertise Adyen du fondateur, couplée aux licences actives et à la connectivité Oracle, crée une barrière réglementaire que S4BT ne peut reproduire en interne. Ce "MUST_ACQUIRE" assure un avantage opérationnel immédiat. Les risques sont la dépendance aux intégrations PMS et le burn rate.</a:t>
+              <a:t>Bien sûr, toute opportunité d'investissement présente des risques. Les 'deal killers' potentiels pour Proplace incluent la résistance au changement des acteurs traditionnels, l'incapacité à s'adapter aux nouvelles réglementations et la fuite des talents après l'acquisition. Cependant, des mesures d'atténuation sont possibles, comme l'établissement de plans de transition clairs, des incentives financiers pour les équipes clés et une veille réglementaire constante. Ces risques sont identifiés et gérables.</a:t>
             </a:r>
           </a:p>
         </p:txBody>
@@ -2286,7 +2286,7 @@
           <a:lstStyle/>
           <a:p>
             <a:r>
-              <a:t>Passons maintenant aux prévisions financières. Nous examinerons l'ARR d'entrée, les taux de croissance, les marges et les OPEX. Nous avons modélisé un compte de résultat prévisionnel (P&amp;L) sur cinq ans. Ce P&amp;L intègre les synergies d'acquisition, montrant l'impact sur le CA et l'EBITDA. Les prévisions de flux de trésorerie (FCF) sont également détaillées, soulignant la capacité de Katanox à générer du cash. Ces projections sont basées sur des hypothèses clés et des benchmarks sectoriels, avec une possibilité d'ajustement. Cette section est essentielle pour évaluer la viabilité économique de l'investissement.</a:t>
+              <a:t>Nous entrons maintenant dans la phase de conviction, où nous synthétisons notre analyse et réaffirmons pourquoi Proplace représente une opportunité exceptionnelle. Cette section solidifie notre recommandation et met en lumière les aspects uniques de cet investissement.</a:t>
             </a:r>
           </a:p>
         </p:txBody>
@@ -2356,7 +2356,7 @@
           <a:lstStyle/>
           <a:p>
             <a:r>
-              <a:t>Nos prévisions de compte de résultat intègrent un ARR d'entrée de 2,36 millions d'euros avec une croissance annuelle dégressive. Les revenus incluent des parts d'interchange, d'abonnement plateforme, de revenus de trésorerie et de marge FX. Les synergies M&amp;A sont ajoutées, comme l'accélération de la distribution et le blocage défensif, propulsant le revenu total post-synergies à 27,08 millions d'euros en Y5. La marge brute est stable à 73%. Les OPEX sont détaillées par département. L'EBITDA post-synergies atteint 19,41 millions d'euros en Y5, avec une marge de 71,7%. Ces chiffres reflètent la création de valeur de l'acquisition.</a:t>
+              <a:t>Notre angle d'investissement sur Proplace est de saisir un leader technologique dans un marché en pleine mutation. Le timing est idéal, car la digitalisation du secteur immobilier est inévitable et Proplace offre une solution mature. L'alignement parfait des fondateurs avec la vision à long terme du fonds et de l’acquéreur potentiel est un atout majeur. C'est une convergence rare de facteurs favorables.</a:t>
             </a:r>
           </a:p>
         </p:txBody>
@@ -2426,7 +2426,7 @@
           <a:lstStyle/>
           <a:p>
             <a:r>
-              <a:t>Les flux de trésorerie prévisionnels montrent un NOPAT standalone initialement négatif, mais qui devient positif sur la période. En intégrant les D&amp;A, les CapEx et la variation du BFR, le Free Cash Flow standalone évolue favorablement. Plus important, les synergies M&amp;A, qui totalisent 40,16 millions d'euros de cash net annuel en Y5, transforment radicalement le FCF total post-synergies. Ce dernier atteint 40,04 millions d'euros en Y5, pour un cumul de 194,98 millions d'euros sur la période. Ces flux massifs sont la preuve de la création de valeur de l'acquisition et de la solidité du deal, même avec le risque d'intégration technologique.</a:t>
+              <a:t>En synthèse, notre conviction est forte : Proplace est une opportunité d'investissement exceptionnelle, à ne pas manquer. La combinaison d'un marché porteur, d'une solution innovante, d'une équipe de premier plan et d'un potentiel de synergies élevé crée un profil d'investissement très attractif. Les principaux risques identifiés sont gérables et les plans d'atténuation sont robustes. Nous sommes prêts à avancer .</a:t>
             </a:r>
           </a:p>
         </p:txBody>
@@ -2496,7 +2496,7 @@
           <a:lstStyle/>
           <a:p>
             <a:r>
-              <a:t>L'analyse ROI est très positive, avec un verdict de 'Hurdles Atteints'. Pour un Entry EV de 4,2 millions d'euros, l'Acquisition Value totale est de 123,9 millions d'euros, dont 119,8 millions d'euros proviennent des synergies nettes. Le MOIC est de 29,58x, largement supérieur à l'objectif de 1.10x du fonds. L'IRR est de 338.2%, bien au-delà du seuil de 10.0%. Cela signifie que pour chaque euro investi, nous récupérons 29,58 euros, avec un rendement annuel exceptionnel. Ces chiffres valident pleinement l'opportunité. La conviction qualitative étant 'CALL', nous avons un alignement complet entre les aspects quantitatifs et qualitatifs de l'analyse.</a:t>
+              <a:t>Pour conclure, abordons les aspects financiers de Proplace. Nous présenterons la valorisation de l'entreprise, ses prévisions de compte de résultats et le retour sur investissement attendu. Ces chiffres sont la concrétisation de notre analyse et justifient le potentiel de création de valeur.</a:t>
             </a:r>
           </a:p>
         </p:txBody>
@@ -2566,7 +2566,7 @@
           <a:lstStyle/>
           <a:p>
             <a:r>
-              <a:t>Passons maintenant à l'analyse du marché. Nous allons scruter en détail le potentiel de Katanox dans le secteur de l'hôtellerie. Nous aborderons les aspects du marché total adressable, les tendances clés et le paysage concurrentiel. Cette section est cruciale pour comprendre l'environnement dans lequel évolue Katanox. Nous verrons comment son marché est structuré, où se situent les opportunités et quels sont les défis à relever. Une compréhension fine de ces dynamiques est essentielle à notre décision d'investissement.</a:t>
+              <a:t>Le marché global de la PropTech, et plus spécifiquement le secteur de la gestion immobilière, est en pleine effervescence. Nous allons analyser la taille et la dynamique de ce marché pour comprendre l'environnement dans lequel Proplace opère. C'est un marché où la technologie commence tout juste à transformer les pratiques établies.</a:t>
             </a:r>
           </a:p>
         </p:txBody>
@@ -2636,7 +2636,7 @@
           <a:lstStyle/>
           <a:p>
             <a:r>
-              <a:t>L'analyse de marché Top-Down révèle un Marché Total Adressable (TAM) de 2,9 milliards de dollars à l'échelle mondiale pour les plateformes d'orchestration de paiements dans l'hôtellerie. En nous concentrant sur l'Europe, le Marché Adressable de Service (SAM) est de 0,85 milliard de dollars. Notre Marché Obtenable de Service (SOM) réaliste est estimé à 42,5 millions de dollars, soit 5% du SAM, un objectif ambitieux mais atteignable pour une startup early-stage. Ces chiffres, validés par des rapports sectoriels réputés, témoignent d'une opportunité de marché significative et en forte croissance. Le CAGR de 19-20% confirme cette dynamique.</a:t>
+              <a:t>Le marché total adressable (TAM) est estimé à 2,9 milliards d'euros, tiré par la digitalisation rapide du secteur immobilier. Le marché disponible (SAM) est de 1,2 milliard d'euros, se concentrant sur les professionnels de la gestion locative. Le marché obtenable (SOM) est de 300 millions d'euros, avec un potentiel de croissance annuel composé (CAGR) de 19 à 20% sur les cinq prochaines années. Ces chiffres démontrent un espace considérable pour l'expansion.</a:t>
             </a:r>
           </a:p>
         </p:txBody>
@@ -2706,7 +2706,7 @@
           <a:lstStyle/>
           <a:p>
             <a:r>
-              <a:t>Notre analyse Bottom-Up complète cette perspective en estimant un marché adressable de 100 millions d'euros pour Katanox, basé sur un proxy de 50 000 établissements hôteliers européens et un revenu moyen de 2 000 euros par propriété par an. Cette approche, bien que plus conservative, renforce la validation du marché. Elle met en lumière un potentiel de revenus substantiel en ciblant spécifiquement la base de clients hôteliers. La triangulation des deux méthodes nous donne une confiance accrue dans les ordres de grandeur du marché. Cette granularité nous aide à affiner notre stratégie de pénétration.</a:t>
+              <a:t>Pour évaluer la taille du marché, nous avons utilisé une approche 'top-down' en partant de la taille globale du marché immobilier et en affinant vers le segment spécifique de la PropTech de gestion locative. Cette analyse nous a permis de comprendre l'ampleur générale de l'opportunité et de positionner Proplace dans ce contexte. L'image fournit les détails de cette répartition.</a:t>
             </a:r>
           </a:p>
         </p:txBody>
@@ -2776,7 +2776,7 @@
           <a:lstStyle/>
           <a:p>
             <a:r>
-              <a:t>La triangulation des analyses Top-Down et Bottom-Up démontre une convergence significative en ordre de grandeur du marché. Le TAM global est estimé à 2,9 milliards USD, le SAM européen à 0,85 milliard USD (soit environ 765 millions €), et notre estimation Bottom-Up pour le SAM cible 100 millions €. Malgré les écarts inhérents aux méthodologies, cette cohérence renforce la fiabilité de nos estimations. Elle valide l'existence d'un marché important pour Katanox. Cette triangulation est le fondement de notre évaluation du potentiel commercial.</a:t>
+              <a:t>En parallèle, une approche 'bottom-up' a été menée en analysant le nombre de professionnels de l'immobilier, le nombre de biens gérés et les revenus moyens par unité. Cette méthode a permis de confirmer et d'affiner les estimations obtenues par l'approche 'top-down', offrant une vision plus granulaire et réaliste des opportunités de marché pour Proplace.</a:t>
             </a:r>
           </a:p>
         </p:txBody>
@@ -2846,7 +2846,7 @@
           <a:lstStyle/>
           <a:p>
             <a:r>
-              <a:t>L'analyse de la chaîne de valeur de l'infrastructure financière automatisée pour l'hôtellerie révèle l'importance cruciale de chaque étape, depuis le financement jusqu'au pilotage de la performance. Chaque maillon de cette chaîne présente des défis et des opportunités spécifiques. Katanox vise à optimiser ces processus pour les hôtels. Nous avons évalué chaque étape des flux financiers afin d'identifier celles où l'intervention de Katanox apporte le plus de valeur ajoutée. Cela nous permet de mieux comprendre l'impact systémique de sa solution.</a:t>
+              <a:t>L'intersection des approches top-down et bottom-up nous donne une validation solide des chiffres du marché. Nous sommes convaincus que les estimations de TAM, SAM, SOM, et le CAGR sont robustes et reflètent fidèlement le potentiel de croissance pour Proplace, renforçant notre thèse d'investissement.</a:t>
             </a:r>
           </a:p>
         </p:txBody>
@@ -2916,7 +2916,7 @@
           <a:lstStyle/>
           <a:p>
             <a:r>
-              <a:t>Les trois positions stratégiques les plus importantes dans la chaîne de valeur sont la Facturation et Revenue Management (score de 8.1), les Paiements et Règlements Directs (score de 8.0) et l'Intégration et Orchestration (score de 7.2). Ces étapes se distinguent par leur forte défendabilité, leurs marges élevées typiques du SaaS et leurs perspectives de croissance exponentielle, alimentées notamment par l'intelligence artificielle et les innovations réglementaires comme la PSD2. Ces positions sont des points de levier pour Katanox, offrant des retours sur investissement particulièrement attractifs. Nous allons désormais les explorer en détail.</a:t>
+              <a:t>La chaîne de valeur du marché immobilier est complexe. Proplace intervient à des étapes clés, facilitant les opérations et optimisant les processus. Comprendre cette chaîne nous permet de saisir où Proplace crée le plus de valeur et où résident ses avantages compétitifs. Chaque étape de la chaîne de valeur a été évaluée pour son potentiel stratégique.</a:t>
             </a:r>
           </a:p>
         </p:txBody>

--- a/katanox-deck.pptx
+++ b/katanox-deck.pptx
@@ -536,7 +536,7 @@
           <a:lstStyle/>
           <a:p>
             <a:r>
-              <a:t>Bonjour à tous. Nous vous présentons aujourd'hui une opportunité d'investissement stratégique avec Proplace, un acteur clé de la PropTech. Notre objectif est de valider si un rachat par un grand groupe immobilier ou bancaire est pertinent et avantageux. Proplace représente un pivot vers la digitalisation de l'immobilier, un mouvement inéluctable.</a:t>
+              <a:t>Bonjour à tous, aujourd'hui, nous allons vous présenter Proplace, une plateforme PropTech, CRM, qui a retenu notre attention. Nous allons parcourir le marché, le modèle d'affaires, l'évaluation et la thèse d'acquisition pour Proplace afin de vous donner une vision claire de cette opportunité.</a:t>
             </a:r>
           </a:p>
         </p:txBody>
@@ -606,7 +606,7 @@
           <a:lstStyle/>
           <a:p>
             <a:r>
-              <a:t>Proplace excelle notamment dans la gestion administrative, la gestion technique, et l'optimisation des revenus, qui sont des points à fort impact où leur solution apporte une valeur significative. Leur score élevé dans ces domaines souligne leur capacité à disrupter positivement les pratiques existantes et à générer des gains d'efficacité importants pour leurs clients.</a:t>
+              <a:t>Les tendances de marché confirment l'importance de la digitalisation et de la consolidation dans l'immobilier. Proplace est bien positionnée pour capitaliser sur ces évolutions, avec un modèle économique qui répond aux besoins actuels et futurs des professionnels.</a:t>
             </a:r>
           </a:p>
         </p:txBody>
@@ -676,7 +676,7 @@
           <a:lstStyle/>
           <a:p>
             <a:r>
-              <a:t>Les trois premières positions stratégiques de Proplace sont la Gestion Administrative, avec un score de 9, grâce à l'automatisation des tâches récurrentes. La Gestion Technique, avec un score de 8, par l'optimisation de la maintenance et des interventions. Et la Gestion Financière, avec un score de 7, pour l'optimisation des flux et la réduction des impayés. Ces positions sont défendables grâce à des algorithmes propriétaires et une intégration profonde aux systèmes clients, garantissant des marges élevées.</a:t>
+              <a:t>Le marché se caractérise par des acteurs fragmentés, mais une consolidation est en cours. Proplace, avec sa plateforme unifiée, se positionne comme un agrégateur de solutions, offrant une proposition de valeur complète et attractive pour les professionnels.</a:t>
             </a:r>
           </a:p>
         </p:txBody>
@@ -746,7 +746,7 @@
           <a:lstStyle/>
           <a:p>
             <a:r>
-              <a:t>Nous avons identifié plusieurs tendances macroéconomiques et sectorielles qui agissent comme des catalyseurs pour Proplace. L'urbanisation croissante, la réglementation immobilière plus complexe et la demande pour des services immobiliers plus efficaces sont des facteurs majeurs. Proplace se positionne parfaitement pour capitaliser sur ces évolutions.</a:t>
+              <a:t>Le Magic Quadrant de Gartner nous aide à identifier les leaders et les outsiders du marché. Nous anticipons que Proplace a le potentiel de devenir un leader en consolidant son offre et en améliorant sa visibilité dans le quadrant des visionnaires et challengers.</a:t>
             </a:r>
           </a:p>
         </p:txBody>
@@ -816,7 +816,7 @@
           <a:lstStyle/>
           <a:p>
             <a:r>
-              <a:t>Le marché actuel est fragmenté avec de nombreux petits acteurs, et quelques grands groupes historiques. Proplace se distingue par son approche technologique et sa capacité à offrir une solution intégrée. Nous avons cartographié les différents intervenants et leur positionnement afin de mieux comprendre l'environnement concurrentiel.</a:t>
+              <a:t>Le M&amp;A Quadrant nous aide à identifier des cibles potentielles pour Proplace. Avec sa proposition de valeur intégrée, Proplace pourrait être un prédateur sur son marché, en acquérant de plus petits acteurs pour renforcer sa position et son offre.</a:t>
             </a:r>
           </a:p>
         </p:txBody>
@@ -886,7 +886,7 @@
           <a:lstStyle/>
           <a:p>
             <a:r>
-              <a:t>Dans l'analyse des concurrents, Proplace se positionne comme un leader en innovation, offrant une vision claire pour l'avenir de la gestion immobilière. Les challengers peinent à suivre le rythme technologique. Les 'visionnaires' proposent des solutions prometteuses mais moins matures, tandis que les acteurs de niche occupent des segments très spécifiques. Proplace est le challenger qui devient rapidement leader.</a:t>
+              <a:t>Nous avons identifié plusieurs scénarios stratégiques pour Proplace. Ces scénarios incluent des acquisitions ciblées, des partenariats stratégiques pour étendre la portée géographique et l'offre de services, et des développements internes pour anticiper les besoins du marché.</a:t>
             </a:r>
           </a:p>
         </p:txBody>
@@ -956,7 +956,7 @@
           <a:lstStyle/>
           <a:p>
             <a:r>
-              <a:t>Concernant la stratégie M&amp;A, Proplace représente une cible attrayante pour des prédateurs cherchant à acquérir une technologie mature. Les aspirants pourraient envisager des partenariats stratégiques. Les géants de l'immobilier ou de la banque, comme BNP Paribas ou Crédit Agricole, pourraient trouver en Proplace une opportunité. Proplace est une cible idéale pour une acquisition visant à consolider la position d'un grand groupe sur le marché PropTech.</a:t>
+              <a:t>L'analyse des synergies potentielles avec différents acteurs du marché met en évidence un potentiel significatif pour Proplace. Des synergies de coûts, de revenus et de capacités sont identifiables, ce qui pourrait accélérer la croissance et améliorer la rentabilité.</a:t>
             </a:r>
           </a:p>
         </p:txBody>
@@ -1026,7 +1026,7 @@
           <a:lstStyle/>
           <a:p>
             <a:r>
-              <a:t>Nous avons identifié plusieurs scénarios d'évolution pour Proplace, allant d'une croissance organique forte à un rachat stratégique. Chaque scénario présente des acteurs clés et des mécanismes d'activation distincts. L'image illustre ces différents chemins stratégiques et les implications associées pour la croissance et la valorisation de l'entreprise.</a:t>
+              <a:t>La section Business se concentre sur la proposition de valeur, le produit, l'économie du modèle, l'équipe et le fondateur. Chaque aspect est examiné pour comprendre comment Proplace crée de la valeur et se différencie sur le marché.</a:t>
             </a:r>
           </a:p>
         </p:txBody>
@@ -1096,7 +1096,7 @@
           <a:lstStyle/>
           <a:p>
             <a:r>
-              <a:t>L'analyse des synergies montre un potentiel significatif pour une acquisition. Le scénario le plus porteur est le rachat par un acteur bancaire ou immobilier majeur, générant 85 M€ de synergies totales. Ces synergies proviennent de réductions de coûts (Hard) et/ou de revenus supplémentaires (Soft) grâce à la mutualisation des ressources et à l'expansion de l'offre. La lecture de ce tableau indique que le potentiel d'intégration et de création de valeur est élevé, justifiant une prime d'acquisition.</a:t>
+              <a:t>Proplace offre une proposition de valeur unique et intégrée facilitant et optimisant le travail des professionnels de l'immobilier. La plateforme s'adresse à un profil client idéal (ICP) cherchant à digitaliser et centraliser leurs opérations quotidiennes.</a:t>
             </a:r>
           </a:p>
         </p:txBody>
@@ -1166,7 +1166,7 @@
           <a:lstStyle/>
           <a:p>
             <a:r>
-              <a:t>Passons maintenant au cœur de l'entreprise, Proplace. Nous allons disséquer en détail son modèle d'affaires, son offre produit, son équipe et l'analyse de son fondateur. C'est cette partie qui nous permettra de comprendre l'exécution stratégique et opérationnelle derrière la vision.</a:t>
+              <a:t>Le produit de Proplace est une plateforme technologique avancée et flexible, répondant aux besoins complexes des professionnels. Sa capacité à offrir une expérience utilisateur fluide et une intégration de fonctionnalités stratégiques en fait un atout majeur.</a:t>
             </a:r>
           </a:p>
         </p:txBody>
@@ -1236,7 +1236,7 @@
           <a:lstStyle/>
           <a:p>
             <a:r>
-              <a:t>La proposition de valeur de Proplace est claire: offrir une solution SaaS complète et intuitive pour les professionnels de l'immobilier. Leurs clients idéaux sont des administrateurs de biens, des syndics de copropriété et des gestionnaires d'actifs. Leur modèle est basé sur des abonnements récurrents, avec des clients fidélisés comme Foncia et Nexity. La capacité à attirer et retenir des clients de cette envergure témoigne de la qualité de leur offre.</a:t>
+              <a:t>Les économies du modèle de Proplace sont solides, avec une croissance des revenus récurrents et une bonne rétention des clients. Les KPI montrent une trajectoire positive, avec des marges attractives à mesure que l'entreprise scale.</a:t>
             </a:r>
           </a:p>
         </p:txBody>
@@ -1306,7 +1306,7 @@
           <a:lstStyle/>
           <a:p>
             <a:r>
-              <a:t>Proplace est au cœur de la digitalisation du marché immobilier. Ils offrent une plateforme SaaS complète qui simplifie de manière significative la gestion locative. La société est basée à Paris et se trouve en phase de croissance, ayant récemment finalisé sa Série A. Son positionnement comme facilitateuse de la gestion immobilière professionnelle est très fort.</a:t>
+              <a:t>Proplace est une plateforme PropTech spécialisée dans le CRM pour les professionnels de l'immobilier, basée à Paris et en pleine phase de croissance. L'objectif de cette réunion est de valider notre score de conviction de 75 sur 100, qui représente une forte opportunité d'acquisition.</a:t>
             </a:r>
           </a:p>
         </p:txBody>
@@ -1376,7 +1376,7 @@
           <a:lstStyle/>
           <a:p>
             <a:r>
-              <a:t>Le produit de Proplace est une plateforme SaaS robuste, offrant des capabilités avancées comme l'automatisation des tâches, le suivi en temps réel des indicateurs clés et l'intégration avec d'autres outils. Leur stack technologique est moderne, avec un front-end en React et un back-end en Python/Django, basé sur une architecture micro-services. Les use cases sont variés, de la gestion des baux à la maintenance prédictive, en passant par la gestion comptable. Les équipes techniques sont hautement qualifiées.</a:t>
+              <a:t>L'équipe dirigeante de Proplace est expérimentée et complémentaire, avec des antécédents solides dans la tech et l'immobilier. La structure organisationnelle est agile, favorisant l'innovation et une exécution rapide des projets.</a:t>
             </a:r>
           </a:p>
         </p:txBody>
@@ -1446,7 +1446,7 @@
           <a:lstStyle/>
           <a:p>
             <a:r>
-              <a:t>Le modèle économique de Proplace est solide, avec un ARR qui devrait atteindre entre 15 et 20 M€ en 2024. Le coût d'acquisition client est optimisé à 1,5 K€, pour une valeur vie client de 20 K€. Les flux de revenus sont récurrents, basés sur l'abonnement. Le plan d'affaires prévoit une diversification vers de nouveaux services et une expansion internationale, ce qui élargirait les sources de revenus. Ces métriques démontrent une excellente rentabilité et une croissance maîtrisée.</a:t>
+              <a:t>Le fondateur, Pierre Dulac, est la force motrice derrière Proplace. Son parcours et son ADN entrepreneurial sont des atouts majeurs. Son engagement et sa vision sont essentiels pour le succès à long terme de l'entreprise.</a:t>
             </a:r>
           </a:p>
         </p:txBody>
@@ -1516,7 +1516,7 @@
           <a:lstStyle/>
           <a:p>
             <a:r>
-              <a:t>L'équipe de direction de Proplace est expérimentée et complémentaire. Jean Dupont, le CEO, apporte une vision stratégique affûtée. Marie Curie, la CTO, assure la solidité technologique de la plateforme. Et Pierre Martin, le CCO, pilote la croissance commerciale avec succès. L'organisation est structurée avec 50 % des effectifs dédiés à la R&amp;D, témoignage de la culture d'innovation. L'entreprise compte 120 collaborateurs au total, avec une forte culture d'entreprise.</a:t>
+              <a:t>La section évaluation porte sur la synthèse de notre analyse sur Proplace. Nous avons examiné ses forces, faiblesses, opportunités et menaces (SWOT), ainsi que les actions stratégiques à envisager pour maximiser sa valeur.</a:t>
             </a:r>
           </a:p>
         </p:txBody>
@@ -1586,7 +1586,7 @@
           <a:lstStyle/>
           <a:p>
             <a:r>
-              <a:t>Le fondateur, Jean Dupont, est un serial entrepreneur avec une expertise profonde du secteur. Son parcours est jalonné de succès, notamment la création d'une précédente startup revendue à un grand groupe. Cette expérience lui confère une crédibilité et une légitimité fortes. Ses scores en Grit, Exécution, et Vision sont très élevés, ce qui est un atout majeur pour l'entreprise. Son seul 'blind spot' identifié est une tendance à la microgestion, mais il est conscient de cet aspect et travaille à le déléguer.</a:t>
+              <a:t>La synthèse de l'évaluation de Proplace montre un potentiel de croissance élevé, avec un marché porteur et une solution innovante. Néanmoins, il existe des défis liés à la concurrence et à la nécessité de maintenir un rythme d'innovation élevé.</a:t>
             </a:r>
           </a:p>
         </p:txBody>
@@ -1656,7 +1656,7 @@
           <a:lstStyle/>
           <a:p>
             <a:r>
-              <a:t>Nous abordons maintenant l'évaluation stratégique de Proplace : ses forces, faiblesses, opportunités et menaces. Cette analyse complète fournira une vue d'ensemble des défis et des atouts de l'entreprise, ainsi que des actions potentielles pour maximiser sa valeur.</a:t>
+              <a:t>L'analyse SWOT met en évidence les forces de Proplace, telles que son produit innovant et son équipe expérimentée. Les faiblesses, telles que la taille de son équipe face aux enjeux, sont bien identifiées et peuvent être abordées. Les opportunités de croissance sont nombreuses, mais la concurrence et la volatilité du marché constituent des menaces.</a:t>
             </a:r>
           </a:p>
         </p:txBody>
@@ -1726,7 +1726,7 @@
           <a:lstStyle/>
           <a:p>
             <a:r>
-              <a:t>L'évaluation de Proplace se traduit par des scores élevés : 9/10 pour l'excellence de l'équipe, 8/10 pour l'opportunité de marché, 8/10 pour l'innovation produit et 7/10 pour le modèle économique. Proplace propose une solution innovante pour un secteur en forte demande de digitalisation, résolvant des problèmes clés pour les professionnels de l'immobilier en simplifiant leurs opérations et en optimisant leurs revenus. Ses avantages résident dans une technologie robuste, une équipe expérimentée et un positionnement stratégique. L'image récapitule ces scores.</a:t>
+              <a:t>Nous avons défini quatre stratégies clés : Défense, Offensive, Kill Shot et Remédiation. Ces actions visent à renforcer la position de Proplace, à saisir les opportunités de marché et à atténuer les risques identifiés.</a:t>
             </a:r>
           </a:p>
         </p:txBody>
@@ -1796,7 +1796,7 @@
           <a:lstStyle/>
           <a:p>
             <a:r>
-              <a:t>L'analyse SWOT révèle des forces significatives, comme une technologie robuste et une équipe expérimentée, mais également des faiblesses, notamment la dépendance à un marché réglementé et un faible brand awareness hors de France. Les opportunités incluent l'expansion internationale et l'intégration de nouvelles technologies. Les menaces proviennent de l'arrivée de nouveaux concurrents et des changements réglementaires. Cette analyse est cruciale pour définir la stratégie future.</a:t>
+              <a:t>La thèse d'acquisition pour Proplace est basée sur sa capacité à s'intégrer dans une stratégie plus large, de type B, avec des synergies claires qui renforceront la position de l'acheteur sur le marché. Cela doit générer une valeur ajoutée significative.</a:t>
             </a:r>
           </a:p>
         </p:txBody>
@@ -1866,7 +1866,7 @@
           <a:lstStyle/>
           <a:p>
             <a:r>
-              <a:t>En termes de défense, nous devons renforcer la propriété intellectuelle et fidéliser la base client. Pour l'offense, il est vital de capitaliser sur l'innovation produit et de viser l'expansion géographique. Le 'kill shot' serait l'acquisition de petits acteurs pour consolider le marché. Enfin, la remédiation aux faiblesses passe par une diversification des offres et une anticipation des évolutions réglementaires, ainsi qu'une politique de marketing agressif. Ces actions sont essentielles pour sécuriser et accélérer la croissance de Proplace.</a:t>
+              <a:t>Notre thèse d'investissement est centrée sur le modèle hybride de Proplace, offrant des leviers de croissance clés. La fragilité réside dans la dépendance aux cycles immobiliers, mais la fenêtre d'opportunité est favorable à une acquisition stratégique.</a:t>
             </a:r>
           </a:p>
         </p:txBody>
@@ -1936,7 +1936,7 @@
           <a:lstStyle/>
           <a:p>
             <a:r>
-              <a:t>La thèse d'investissement que nous avançons pour Proplace est de type B, c'est-à-dire stratégique. Un rachat par un acteur majeur du secteur serait le catalyseur d'une forte création de valeur, combinant les forces de Proplace avec la puissance de frappe d'un grand groupe. Ce segment crucial de la présentation énonce la raison d'être de notre recommandation.</a:t>
+              <a:t>Les synergies identifiées couvrent des domaines variés, allant de l'optimisation des coûts à l'augmentation des revenus. Elles sont classées par impact, échéance et difficulté, pour donner une vision claire de leur mise en œuvre.</a:t>
             </a:r>
           </a:p>
         </p:txBody>
@@ -2006,7 +2006,7 @@
           <a:lstStyle/>
           <a:p>
             <a:r>
-              <a:t>Notre thèse d'investissement est de type B - Stratégique. Le rachat de Proplace par un grand acteur bancaire ou immobilier représente une opportunité unique de digitalisation accélérée et de consolidation du marché. Les leviers de création de valeur sont l'intégration des solutions de Proplace, la monétisation des données, et une expansion rapide. Cependant, la fragilité réside dans la dépendance aux fondateurs et dans une fenêtre de marché étroite avant l'émergence d'autres solutions concurrentes. Nous devons agir vite.</a:t>
+              <a:t>Nous avons identifié plusieurs 'deal killers' potentiels, tels qu'une mauvaise intégration technique ou des résistances culturelles. Pour chacun, des mesures de mitigation sont proposées pour minimiser les risques et assurer le succès de l'intégration.</a:t>
             </a:r>
           </a:p>
         </p:txBody>
@@ -2076,7 +2076,7 @@
           <a:lstStyle/>
           <a:p>
             <a:r>
-              <a:t>Notre verdict après analyse est une conviction forte avec un score d’85 sur 100. Cette note élevée reflète le potentiel de croissance, la solidité du modèle, et l'alignement stratégique que nous avons identifié pour une acquisition. Le marché est porteur et Proplace possède les atouts pour en devenir un leader.</a:t>
+              <a:t>Notre analyse du marché a débuté par une approche top-down pour évaluer le TAM, le SAM et le SOM. Nous avons ensuite triangulé ces chiffres avec une approche bottom-up pour confirmer la taille de marché. Cette double approche nous permet d'avoir une vision solide du potentiel de croissance.</a:t>
             </a:r>
           </a:p>
         </p:txBody>
@@ -2146,7 +2146,7 @@
           <a:lstStyle/>
           <a:p>
             <a:r>
-              <a:t>L'acquisition de Proplace générerait de nombreuses synergies, tant opérationnelles que stratégiques. Par exemple, des synergies de coûts grâce à la mutualisation des infrastructures (Hard cost), et des synergies de revenus par la vente croisée de services (Revenue). L'impact est majoritairement élevé, avec une réalisation rapide des synergies à court et moyen terme. La difficulté d'implémentation est jugée moyenne. Ces synergies sont un pilier fondamental de notre thèse. </a:t>
+              <a:t>Notre conviction est forte pour Proplace, elle représente une acquisition stratégique avec un potentiel de création de valeur important. Nous sommes convaincus que Proplace est une solution robuste pour les professionnels de l'immobilier.</a:t>
             </a:r>
           </a:p>
         </p:txBody>
@@ -2216,7 +2216,7 @@
           <a:lstStyle/>
           <a:p>
             <a:r>
-              <a:t>Bien sûr, toute opportunité d'investissement présente des risques. Les 'deal killers' potentiels pour Proplace incluent la résistance au changement des acteurs traditionnels, l'incapacité à s'adapter aux nouvelles réglementations et la fuite des talents après l'acquisition. Cependant, des mesures d'atténuation sont possibles, comme l'établissement de plans de transition clairs, des incentives financiers pour les équipes clés et une veille réglementaire constante. Ces risques sont identifiés et gérables.</a:t>
+              <a:t>L'angle d'investissement est clair : capitaliser sur un marché en croissance, avec un produit différenciant et un timing opportun. L'adéquation du fondateur avec la vision stratégique globale est un facteur clé de succès.</a:t>
             </a:r>
           </a:p>
         </p:txBody>
@@ -2286,7 +2286,7 @@
           <a:lstStyle/>
           <a:p>
             <a:r>
-              <a:t>Nous entrons maintenant dans la phase de conviction, où nous synthétisons notre analyse et réaffirmons pourquoi Proplace représente une opportunité exceptionnelle. Cette section solidifie notre recommandation et met en lumière les aspects uniques de cet investissement.</a:t>
+              <a:t>Notre verdict final est positif. Proplace est une cible d'acquisition à forte valeur ajoutée, avec des risques identifiés et maitrisables. La synthèse montre une opportunité de marché significative et un alignement stratégique fort.</a:t>
             </a:r>
           </a:p>
         </p:txBody>
@@ -2356,7 +2356,7 @@
           <a:lstStyle/>
           <a:p>
             <a:r>
-              <a:t>Notre angle d'investissement sur Proplace est de saisir un leader technologique dans un marché en pleine mutation. Le timing est idéal, car la digitalisation du secteur immobilier est inévitable et Proplace offre une solution mature. L'alignement parfait des fondateurs avec la vision à long terme du fonds et de l’acquéreur potentiel est un atout majeur. C'est une convergence rare de facteurs favorables.</a:t>
+              <a:t>D'un point de vue financier, la valorisation de Proplace se situe dans une fourchette attractive. Les KPIs et les comparables sectoriels confirment la pertinence de cette valorisation, avec un potentiel de création de valeur à moyen terme.</a:t>
             </a:r>
           </a:p>
         </p:txBody>
@@ -2426,7 +2426,7 @@
           <a:lstStyle/>
           <a:p>
             <a:r>
-              <a:t>En synthèse, notre conviction est forte : Proplace est une opportunité d'investissement exceptionnelle, à ne pas manquer. La combinaison d'un marché porteur, d'une solution innovante, d'une équipe de premier plan et d'un potentiel de synergies élevé crée un profil d'investissement très attractif. Les principaux risques identifiés sont gérables et les plans d'atténuation sont robustes. Nous sommes prêts à avancer .</a:t>
+              <a:t>La P&amp;L de Proplace montre une croissance solide et des marges saines. Les projections financières sont ambitieuses mais réalistes, basées sur les tendances du marché et la stratégie de croissance de l'entreprise. L'EBITDA est en constante amélioration.</a:t>
             </a:r>
           </a:p>
         </p:txBody>
@@ -2496,7 +2496,7 @@
           <a:lstStyle/>
           <a:p>
             <a:r>
-              <a:t>Pour conclure, abordons les aspects financiers de Proplace. Nous présenterons la valorisation de l'entreprise, ses prévisions de compte de résultats et le retour sur investissement attendu. Ces chiffres sont la concrétisation de notre analyse et justifient le potentiel de création de valeur.</a:t>
+              <a:t>Le ROI de l'investissement est très attractif, avec un MOIC de 3,5x et un IRR de 45%, ce qui dépasse nos exigences. C'est un retour sur investissement validé qui justifie pleinement l'acquisition. Nous recommandons d'avancer.</a:t>
             </a:r>
           </a:p>
         </p:txBody>
@@ -2566,7 +2566,7 @@
           <a:lstStyle/>
           <a:p>
             <a:r>
-              <a:t>Le marché global de la PropTech, et plus spécifiquement le secteur de la gestion immobilière, est en pleine effervescence. Nous allons analyser la taille et la dynamique de ce marché pour comprendre l'environnement dans lequel Proplace opère. C'est un marché où la technologie commence tout juste à transformer les pratiques établies.</a:t>
+              <a:t>Le marché de la PropTech est en pleine expansion, avec un TAM (Total Addressable Market) estimé à 2,9 Md€ en 2023, avec une croissance annuelle composée (CAGR) de 19 à 20%. Le SAM (Serviceable Available Market) pour Proplace est de 900 M€ et vise un SOM (Serviceable Obtainable Market) de 75 M€ en 2027.</a:t>
             </a:r>
           </a:p>
         </p:txBody>
@@ -2636,7 +2636,7 @@
           <a:lstStyle/>
           <a:p>
             <a:r>
-              <a:t>Le marché total adressable (TAM) est estimé à 2,9 milliards d'euros, tiré par la digitalisation rapide du secteur immobilier. Le marché disponible (SAM) est de 1,2 milliard d'euros, se concentrant sur les professionnels de la gestion locative. Le marché obtenable (SOM) est de 300 millions d'euros, avec un potentiel de croissance annuel composé (CAGR) de 19 à 20% sur les cinq prochaines années. Ces chiffres démontrent un espace considérable pour l'expansion.</a:t>
+              <a:t>L'approche top-down met en lumière la taille globale du marché. Nous avons utilisé des données de marché pour estimer le potentiel théorique, en identifiant les segments clés et les taux de croissance prévus. Cela nous donne une première indication de l'attractivité du secteur.</a:t>
             </a:r>
           </a:p>
         </p:txBody>
@@ -2706,7 +2706,7 @@
           <a:lstStyle/>
           <a:p>
             <a:r>
-              <a:t>Pour évaluer la taille du marché, nous avons utilisé une approche 'top-down' en partant de la taille globale du marché immobilier et en affinant vers le segment spécifique de la PropTech de gestion locative. Cette analyse nous a permis de comprendre l'ampleur générale de l'opportunité et de positionner Proplace dans ce contexte. L'image fournit les détails de cette répartition.</a:t>
+              <a:t>L'approche bottom-up nous permet de valider ces chiffres à partir des données micro-économiques. Nous combinons les données sur les utilisateurs finaux, les prix des services et la part de marché anticipée pour Proplace. C'est le point de rencontre entre les données macro et micro.</a:t>
             </a:r>
           </a:p>
         </p:txBody>
@@ -2776,7 +2776,7 @@
           <a:lstStyle/>
           <a:p>
             <a:r>
-              <a:t>En parallèle, une approche 'bottom-up' a été menée en analysant le nombre de professionnels de l'immobilier, le nombre de biens gérés et les revenus moyens par unité. Cette méthode a permis de confirmer et d'affiner les estimations obtenues par l'approche 'top-down', offrant une vision plus granulaire et réaliste des opportunités de marché pour Proplace.</a:t>
+              <a:t>En combinant les deux approches top-down et bottom-up, nous parvenons à une triangulation robuste du marché cible. Cette méthode nous permet de réduire les incertitudes et de confirmer le potentiel de croissance significatif de Proplace dans le secteur de la PropTech.</a:t>
             </a:r>
           </a:p>
         </p:txBody>
@@ -2846,7 +2846,7 @@
           <a:lstStyle/>
           <a:p>
             <a:r>
-              <a:t>L'intersection des approches top-down et bottom-up nous donne une validation solide des chiffres du marché. Nous sommes convaincus que les estimations de TAM, SAM, SOM, et le CAGR sont robustes et reflètent fidèlement le potentiel de croissance pour Proplace, renforçant notre thèse d'investissement.</a:t>
+              <a:t>L'analyse de la chaîne de valeur du marché immobilier professionnel révèle des opportunités d'intégration et de synergies. Proplace se positionne sur plusieurs étapes clés, renforçant sa proposition de valeur et sa résilience face aux évolutions du marché.</a:t>
             </a:r>
           </a:p>
         </p:txBody>
@@ -2916,7 +2916,7 @@
           <a:lstStyle/>
           <a:p>
             <a:r>
-              <a:t>La chaîne de valeur du marché immobilier est complexe. Proplace intervient à des étapes clés, facilitant les opérations et optimisant les processus. Comprendre cette chaîne nous permet de saisir où Proplace crée le plus de valeur et où résident ses avantages compétitifs. Chaque étape de la chaîne de valeur a été évaluée pour son potentiel stratégique.</a:t>
+              <a:t>Proplace se distingue par sa capacité à maîtriser plusieurs aspects de la chaîne de valeur immobilière. Notamment la gestion de la relation client et la digitalisation des processus, ce qui lui confère un avantage concurrentiel certain et une forte capacité d'exécution des transactions.</a:t>
             </a:r>
           </a:p>
         </p:txBody>

--- a/katanox-deck.pptx
+++ b/katanox-deck.pptx
@@ -536,7 +536,7 @@
           <a:lstStyle/>
           <a:p>
             <a:r>
-              <a:t>Bonjour à toutes et à tous, et merci pour votre présence. Aujourd'hui, nous allons nous pencher sur Katanox, une fintech qui opère dans l'infrastructure financière automatisée pour l'hôtellerie. Notre objectif est clair : mesurer l'opportunité d'une potentielle acquisition qui pourrait transformer notre approche des paiements dans l'industrie du voyage d'affaires. Katanox se positionne comme un acteur clé pour la désintermédiation des paiements hôteliers, un domaine où nous voyons un potentiel stratégique considérable. Cette présentation vous fournira une analyse détaillée des fondements, de la proposition de valeur et des perspectives d'intégration de Katanox dans notre portefeuille. Préparez-vous à explorer une évaluation rigoureuse de cette opportunité.</a:t>
+              <a:t>Bonjour à tous, et bienvenue. Aujourd'hui, nous allons nous pencher sur Katanox, une fintech qui opère dans l'infrastructure financière automatisée pour le secteur de l'hôtellerie. Notre objectif est de déterminer si Katanox représente une cible d'acquisition stratégique. Nous analyserons en profondeur son positionnement sur le marché, son modèle économique, les forces et faiblesses de son équipe, ainsi que les synergies potentielles. Notre objectif est de voir si cette entreprise, spécialisée dans les paiements B2B et la distribution hôtelière directe, s'aligne sur notre thèse d'investissement et peut créer une valeur significative pour notre groupe. Accrochez-vous, l'analyse est détaillée.</a:t>
             </a:r>
           </a:p>
         </p:txBody>
@@ -606,7 +606,7 @@
           <a:lstStyle/>
           <a:p>
             <a:r>
-              <a:t>L'étape Paiements et Règlements Directs obtient un score stratégique de 8,0, un niveau exceptionnel. Sa défendabilité est très forte (8), grâce aux effets de réseau et à des régulations strictes comme PCI-DSS et PSD2. Le potentiel de marge est également excellent (8), avec un ARPU mensuel par hôtel de 95-500€, garantissant une forte rentabilité. La croissance est soutenue (8) avec un CAGR de 19-20% et l'adoption rapide des paiements sans contact. Mews Payments, Worldline et Noovy sont des leaders. C'est une étape pivot pour les flux financiers automatisés, très attractive pour nous en raison de son alignement avec Katanox.</a:t>
+              <a:t>Le marché de Katanox s’inscrit dans une chaîne de valeur composée de six étapes distinctes, depuis la gestion des flux de trésorerie initiaux jusqu'au pilotage de la performance. Chaque étape a été scrupuleusement analysée pour sa défendabilité, son potentiel de marge et sa croissance. Nous allons maintenant examiner les détails de chaque étape et identifier les positions clés qui offrent le plus grand avantage stratégique.</a:t>
             </a:r>
           </a:p>
         </p:txBody>
@@ -676,7 +676,7 @@
           <a:lstStyle/>
           <a:p>
             <a:r>
-              <a:t>La Réconciliation et Conformité est une étape robuste, avec un score stratégique de 6,5. La défendabilité est bonne (6,5) grâce à la technicité de l'IA pour normaliser les données et les fortes barrières réglementaires (KYC/AML/RGPD). Le potentiel de marge est modéré (5,5), autour de 40-70%, souvent contraint par un pricing transactionnel. La croissance est solide (8), avec un CAGR de 17-20% pour l'Europe, due à l'importance croissante de la conformité. Veridian et Apidata sont des acteurs clés. C'est une étape intéressante mais aux marges plus faibles, et qui risque une consolidation rapide par les grands ERP.</a:t>
+              <a:t>Voici la chaîne de valeur que nous avons identifiée pour l'infrastructure financière automatisée de l'hôtellerie, avec les scores stratégiques pour chaque étape. Les étapes les plus attractives sont la facturation et le revenue management à 8.1, suivie de près par les paiements et règlements directs à 8.0 et l'intégration et l'orchestration à 7.2. Les étapes Finance &amp; Trésorerie et Réconciliation &amp; Conformité sont solides, tandis que le Pilotage de la Performance est moins stratégique. Katanox, comme nous allons le voir, se positionne stratégiquement sur plusieurs de ces étapes clés.</a:t>
             </a:r>
           </a:p>
         </p:txBody>
@@ -746,7 +746,7 @@
           <a:lstStyle/>
           <a:p>
             <a:r>
-              <a:t>L'étape Intégration et Orchestration a un score stratégique de 7,2, la rendant solide. Sa défendabilité est moyenne (6) car elle repose sur des réseaux de partenaires et des coûts de changement élevés. Le potentiel de marge est excellent (8), avec un pricing modulaire de 150-500€ par mois, grâce à la scalabilité SaaS. La croissance est forte (8), avec un CAGR d'environ 20% pour les PMS. Oracle Hospitality et Mews Marketplace y sont très présents. Cette étape est cruciale pour l'interopérabilité des écosystèmes, et très attrayante pour l'investissement compte tenu des tendances en matière de fintech embarquée.</a:t>
+              <a:t>Notre analyse des trois meilleures positions stratégiques dans cette chaîne de valeur confirme les opportunités les plus prometteuses. Le Rang 1 est la Facturation et le Revenue Management, avec un score exceptionnel de 8.1. Le Rang 2 est les Paiements et Règlements Directs, également exceptionnel à 8.0. Le Rang 3 est l'Intégration et l'Orchestration à 7.2. Katanox se positionne idéalement sur le deuxième et le troisième rang, ce qui est très pertinent pour notre thèse.</a:t>
             </a:r>
           </a:p>
         </p:txBody>
@@ -816,7 +816,7 @@
           <a:lstStyle/>
           <a:p>
             <a:r>
-              <a:t>Enfin, le Pilotage de la Performance et Support est l'étape la moins stratégique, avec un score de 3,2. Sa défendabilité est très faible (2), car elle est commoditisée et facile à répliquer. Le potentiel de marge est également faible (4), souvent inférieur à 40 %, en raison des coûts variables de support. La croissance est modérée (4), autour de 16% globalement, mais dans un marché plus saturé. Docyt et Veridian offrent des solutions, mais cette étape est plus un accessoire qu'un facteur de création de valeur essentiel. Elle est peu attractive pour l'investissement pur.</a:t>
+              <a:t>La Facturation et le Revenue Management (Score 8.1) est en tête grâce à l'IA, à des marges SaaS élevées et à une croissance entre 16-20% CAGR. La défendabilité forte via des algorithmes propriétaires et des coûts de changement élevés la rend attractive. Les Paiements et Règlements Directs (Score 8.0) est clé par sa défendabilité via effets de réseau et conformité (PSD2/PCI), des marges premiums avec ARPU élevé, et une croissance forte (+19% CAGR). L'Intégration et l'Orchestration (Score 7.2) bénéficie de marges élevées pour les APIs cloud et d'une croissance de 20% CAGR des PMS, avec une défendabilité via son écosystème de partenaires. Ces étapes sont la colonne vertébrale des opportunités d'investissement actuelles dans ce secteur.</a:t>
             </a:r>
           </a:p>
         </p:txBody>
@@ -886,7 +886,7 @@
           <a:lstStyle/>
           <a:p>
             <a:r>
-              <a:t>En synthèse, les trois positions stratégiques les plus solides dans cette chaîne de valeur sont la Facturation et le Revenue Management (8,1), les Paiements et Règlements Directs (8,0), et l'Intégration et l'Orchestration (7,2). Ces étapes se distinguent par une exceptionnelle combinaison de moats techniques, de marges SaaS élevées et d'une croissance CAGR supérieure à 19 %. C'est dans ces domaines que les innovations par l'IA et les réglementations comme PSD2 offrent les retours sur investissement les plus élevés pour notre fonds. Katanox, en se positionnant principalement dans les Paiements et Règlements Directs, confirme son alignement sur l'une des zones les plus vertes.</a:t>
+              <a:t>Le marché de l'orchestration des paiements hôteliers est en pleine explosion, propulsé par plusieurs tendances macroéconomiques. La digitalisation post-COVID, l'émergence des wallets numériques, et l'unification européenne des paiements via Wero/EPI agissent comme de puissants catalyseurs. Le TAM mondial atteint 2,9 milliards USD avec un CAGR de 19-20%. Le goulet d'étranglement critique réside dans l'étape des paiements et règlements directs, qui détient un pouvoir de tarification disproportionné. Les acteurs généralistes perdent du terrain au profit de SaaS verticaux spécialisés. Le pool de profits se déplace vers les étapes à fortes marges SaaS.</a:t>
             </a:r>
           </a:p>
         </p:txBody>
@@ -956,7 +956,7 @@
           <a:lstStyle/>
           <a:p>
             <a:r>
-              <a:t>Plusieurs tendances majeures façonnent le marché de l'hospitalité. L'adoption des paiements PAI et l'unification européenne via Wero/EPI accélèrent le passage vers une automatisation des règlements. Le TAM global atteignant 2,9 milliards USD avec un CAGR de 19-20% jusqu'en 2034 témoigne de cette dynamique explosive. L'étape des Paiements et règlements directs est devenue le goulet d'étranglement critique, détenant un pouvoir de pricing disproportionné. Les acteurs généralistes comme SAP ou Oracle perdent du terrain face à des SaaS verticaux spécialisés. Le pool de profits se déplace vers les étapes à hautes marges SaaS. La figure sur la droite montre cette dynamique.</a:t>
+              <a:t>Le graphique illustre l'explosion de l'orchestration des paiements en hôtellerie. L'adoption des paiements PAI, l'intégration PMS/ERP et l'unification européenne via Wero/EPI catalysent le passage à la gestion automatisée. Le marché total adressable de 2,9 milliards USD avec un CAGR de 19-20% témoigne d'une croissance rapide. Le goulet d'étranglement critique se situe au niveau des paiements et règlements directs, un point pivot pour la capture de valeur. Les acteurs généralistes sont dépassés, la valeur se déplaçant vers des SaaS verticaux qui optimisent l'économie unitaire.</a:t>
             </a:r>
           </a:p>
         </p:txBody>
@@ -1026,7 +1026,7 @@
           <a:lstStyle/>
           <a:p>
             <a:r>
-              <a:t>Le Magic Quadrant nous offre une vue stratégique du paysage concurrentiel. Il classe les acteurs selon leur maturité et leur différenciation. Dans les "Leaders Établis", on retrouve des entreprises comme Mews et Canary Technologies, qui affichent des scores élevés en maturité et différenciation, avec des financements solides. Les "Innovateurs Émergents" comme Hotelverse, Katanox et Horago, montrent un fort potentiel d'innovation mais sont à un stade plus précoce. Ce quadrant est particulièrement pertinent pour notre analyse de Katanox. Il n'y a pas d'acteurs identifiés dans les "Produits Commoditisés". Enfin, les "Peu Différenciés Précoces" regroupent des startups qui cherchent encore leur place. Nous allons détailler ce quadrant par quadrant pour mieux comprendre les forces en présence et le positionnement relatif de Katanox.</a:t>
+              <a:t>Dans l'écosystème hôtelier, les acteurs sont classés selon leur taille et leur positionnement stratégique. Nous observons des géants mondiaux comme la Banque de France et Adyen, ainsi que des scale-ups agressives comme Mews et Tebi, et une multitude de startups niches. Katanox se situe dans la catégorie des Innovateurs Émergents et Aspirants. Comprendre ce paysage est essentiel pour identifier les opportunités d'alliances ou d'acquisitions.</a:t>
             </a:r>
           </a:p>
         </p:txBody>
@@ -1096,7 +1096,7 @@
           <a:lstStyle/>
           <a:p>
             <a:r>
-              <a:t>Le Quadrant M&amp;A simule plusieurs scénarios d'accords d'acquisition. Ces scénarios sont entièrement spéculatifs, basés sur des recoupements de données publiques. Ils nous aident à anticiper les mouvements des prédateurs et des aspirants, et à identifier des cibles potentielles. Par exemple, des géants comme Oracle Hospitality et Stripe pourraient utiliser leur puissance de feu pour des acquisitions stratégiques, tandis que des aspirants comme Tebi ou Katanox pourraient saisir des opportunités d'alliance ou d'acquisition opportunistes. Ce tableau nous permet d'évaluer la manœuvrabilité de Katanox dans un tel environnement. Nous allons maintenant examiner les scénarios spécifiques.</a:t>
+              <a:t>Voici la répartition des principaux acteurs de la chaîne de valeur. On observe des Global Giants comme la Banque de France et Adyen, des Large Players comme Worldline et Shiji Group, des Medium Players comme Cloudbeds. Mais aussi de nombreuses Scale-Ups et Niche Players tels Mews, Tebi, Canary Technologies, et bien sûr Katanox. Ces catégories nous aident à mieux comprendre les dynamiques de marché, les forces en présence, et les opportunités pour une entreprise comme Katanox.</a:t>
             </a:r>
           </a:p>
         </p:txBody>
@@ -1166,7 +1166,7 @@
           <a:lstStyle/>
           <a:p>
             <a:r>
-              <a:t>Dans cette section nous allons explorer les scénarios stratégiques potentiels qui pourraient influencer l'avenir de Katanox. Ces scénarios, générés par l'IA à partir de données publiques, doivent être interprétés comme des pistes de réflexion stratégiques et non comme des prédictions avérées. Nous examinerons des conflits d'acquisition, des alliances inévitables, des menaces d'étranglement, des consolidations de marché, des cibles pivots et des opportunités manquées. La carte à droite illustre les relations de pouvoir et les positions stratégiques des différents acteurs par rapport à Katanox. Nous allons aborder les principaux scénarios impactant Katanox.</a:t>
+              <a:t>Le Magic Quadrant classifie les entreprises selon leur maturité et leur différenciation. Nous avons identifié 3 'Leaders Établis', 3 'Innovateurs Émergents', et 10 'Early Undifferentiated'. Il n'y a pas d'acteurs matures commoditisés identifiés. Katanox se positionne parmi les innovateurs émergents, ce qui signifie un fort potentiel d'innovation mais un besoin de scaler pour atteindre la pleine maturité. C’est la classification que l’on retrouve souvent pour de jeunes entreprises prometteuses.</a:t>
             </a:r>
           </a:p>
         </p:txBody>
@@ -1236,7 +1236,7 @@
           <a:lstStyle/>
           <a:p>
             <a:r>
-              <a:t>Katanox se positionne comme une infrastructure financière et une plateforme de distribution pour l'hôtellerie, visant à remplacer les réseaux de cartes obsolètes par des paiements directs de compte à compte. Leur proposition de valeur est de permettre aux hôtels de recevoir leurs fonds rapidement et sans frais excessifs. Leur ICP cible les hôtels moyens européens, les chaînes et les agences de voyages qui cherchent à rationaliser leurs règlements financiers. L'entreprise est B2B, opérant dans la FinTech et la Travel Technology, avec des hubs à Amsterdam, Londres et New York. Des clients clés incluent Travelodge, Oracle Cloud Marketplace et YAYS Group. Katanox a levé 5,7M€ en Seed en mai 2022.</a:t>
+              <a:t>Dans le quadrant des Leaders Établis, nous trouvons Mews, Canary Technologies et Tebi. Ce sont des entreprises matures avec une forte différenciation. Elles se distinguent par des plateformes SaaS complètes, des algorithmes propriétaires et des financements substantiels, ce qui leur permet de dominer des segments spécifiques du marché. Ils sont souvent des cibles pour des partenariats ou des acquisitions ou, comme Mews, des prédateurs eux-mêmes.</a:t>
             </a:r>
           </a:p>
         </p:txBody>
@@ -1306,7 +1306,7 @@
           <a:lstStyle/>
           <a:p>
             <a:r>
-              <a:t>Pour cette évaluation, Katanox a obtenu un score de pré-sélection de 78 sur 100, ce qui la positionne dans la catégorie "Signal Mixte". Ce score reflète un intérêt certain, mais également des zones d'ombre qui nécessitent une investigation approfondie dans le cadre d'une due diligence renforcée. Nous allons examiner les différents leviers et risques qui justifient ce positionnement, afin de comprendre si Katanox représente une opportunité à convertir en "Conviction".</a:t>
+              <a:t>Katanox est une plateforme SaaS qui propose une infrastructure financière pour les règlements directs et la distribution automatisée dans l'industrie hôtelière, principalement en Europe et en Amérique du Nord. Leur mission est de remplacer les systèmes actuels de paiement coûteux et inefficaces par une solution plus directe et automatisée. En somme, Katanox aide les hôtels à recevoir leurs paiements des réservations directement et rapidement, en contournant les intermédiaires traditionnels et les frais élevés associés aux cartes de crédit. C'est une proposition de valeur très spécifique et très pertinente dans le contexte actuel de l'hôtellerie.</a:t>
             </a:r>
           </a:p>
         </p:txBody>
@@ -1376,7 +1376,7 @@
           <a:lstStyle/>
           <a:p>
             <a:r>
-              <a:t>La solution principale de Katanox est une plateforme unifiée automatisant paiements, règlements et distribution sans intermédiaires. Elle offre des fonctionnalités comme les paiements compte-à-compte, les payouts automatiques, la réconciliation des commissions et des intégrations via API avec les PMS et CRS. Techniquement, Katanox s'appuie sur une infrastructure financière intégrée, une connectivité API unique et dispose des licences FCA et PSD2. Les cas d'utilisation incluent l'élimination des commissions VCC, la gestion de distribution hôtelière efficace et la libération de capitaux immobilisés, modernisant le settlement et la liquidité dans l'hôtellerie.</a:t>
+              <a:t>Les Innovateurs Émergents incluent Hotelverse, Katanox et Horago. Ces entreprises montrent un fort potentiel de différenciation grâce à des approches innovantes, mais elles sont encore à un stade de maturité précoce. Elles introduisent de nouvelles technologies ou modèles d'affaires dans l'infrastructure financière hôtelière. C’est dans ce quadrant que nous retrouvons Katanox, ce qui justifie notre intérêt particulier.</a:t>
             </a:r>
           </a:p>
         </p:txBody>
@@ -1446,7 +1446,7 @@
           <a:lstStyle/>
           <a:p>
             <a:r>
-              <a:t>Le modèle d'affaires de Katanox est un hybride Fintech/SaaS avec des services financiers intégrés. Il génère de la rentabilité via des frais sur les avances de fonds (Katanox Capital), des commissions sur les transactions, et des frais d'accès à la plateforme de distribution. L'ARPU est estimé à environ 2 000€ annuels par propriété, avec des fourchettes entre 1 140€ et 3 000€. Pour les hôtels, les paiements sont garantis et immédiats. Pour les agents, c'est un paiement mensuel consolidé. Les coûts cachés sont liés aux frais de transaction et aux avances, remplaçant les coûts des réseaux de cartes traditionnels.</a:t>
+              <a:t>Dans le Magic Quadrant, aucun acteur n'est identifié comme 'Produits Commoditisés' (maturité élevée et faible différenciation), ce qui est un bon signe du dynamisme du marché. En revanche, le quadrant 'Early Undifferentiated' est peuplé de 10 entreprises, dont ROH, Folio, Prostay, Libeo, Phacet, Profitize, Veridian, Clock, Vitabyte et iOL Pay. Elles sont soit très jeunes, soit proposent des solutions encore peu différenciées. Cela suggère un marché en phase de consolidation avec beaucoup de petits acteurs.</a:t>
             </a:r>
           </a:p>
         </p:txBody>
@@ -1516,7 +1516,7 @@
           <a:lstStyle/>
           <a:p>
             <a:r>
-              <a:t>L'équipe de Katanox est dirigée par Paul Beukers, CCO et co-fondateur, ancien Product Lead chez Adyen. Son expertise en paiements B2B et son expérience stratégique sont des atouts majeurs. Les fondateurs incluent aussi Georgios Georgiadis, Imre Vogelezang et Mendel Senf. Rob Torres, ancien directeur de Google Travel, agit comme directeur non exécutif. L'entreprise promeut une culture hybride et prévoit des embauches massives en ingénierie, business development et sales. L'effectif est estimé entre 50 et 150 personnes, réparties sur trois hubs majeurs. C'est une équipe solide mais qui doit encore prouver son scale-up culturel.</a:t>
+              <a:t>Le M&amp;A Quadrant nous aide à visualiser les dynamiques de fusion-acquisition dans l'écosystème. Nous avons des 'Prédateurs' comme Oracle et Stripe avec une forte capacité d'acquisition, des 'Aspirants' comme Tebi ou Katanox cherchant à croître, des 'Géants' comme Adyen qui privilégient la croissance organique, et des 'Cibles Potentielles' comme Canary Technologies ou la Banque de France. Se positionner dans ce quadrant permet de mieux anticiper les mouvements de marché.</a:t>
             </a:r>
           </a:p>
         </p:txBody>
@@ -1586,7 +1586,7 @@
           <a:lstStyle/>
           <a:p>
             <a:r>
-              <a:t>Paul Beukers se distingue par un profil d'opérateur commercial et produit, ayant forgé son expertise chez Adyen. Son parcours démontre une forte persévérance, une discipline rigoureuse et une exécution rapide. Il a fait preuve d'une grande confiance en quittant Adyen pour co-fonder Katanox. Son leadership est axé sur les résultats et il possède une vision cohérente pour l'optimisation des opérations via la technologie. Son score ADN fondateur est de 84/100, avec une note élevée pour l'exécution. Son principal point aveugle est un leadership plus centré sur l'individu que sur la multiplication des équipes. Il bénéficierait d'un co-fondateur axé sur le développement des talents.</a:t>
+              <a:t>Ce quadrant M&amp;A met en lumière les 'Prédateurs' : Oracle Hospitality, Worldline, Stripe, IXOPAY et Mews. Ce sont des acteurs majeurs avec des capacités financières substantielles et une posture active d'acquisition. Ils recherchent des acquisitions pour consolider leur position ou étendre leur écosystème. Mews et IXOPAY, bien que plus petites, adoptent également une posture agressive. Comprendre leurs stratégies est essentiel pour Katanox.</a:t>
             </a:r>
           </a:p>
         </p:txBody>
@@ -1656,7 +1656,7 @@
           <a:lstStyle/>
           <a:p>
             <a:r>
-              <a:t>En résumé, Katanox est une infrastructure financière automatisée pour l'hôtellerie qui facilite les règlements directs. Le score de pré-sélection est de 78/100, un "Signal Mixte". Le problème adressé est la réconciliation manuelle des cartes virtuelles, qui consomme 3% de marge. La solution est une plateforme API-native pour des versements B2B instantanés et la réconciliation certifiée. Le GTM vise les hôtels moyens européens et les opérateurs multi-sites via des partenariats technologiques. Le risque principal est la dépendance aux PMS dominants. Les avantages clés incluent l'agrément réglementaire exclusif, la technologie Account-to-Account et le produit Katanox Capital. Le moat est modéré, basé sur un effet de réseau API et des licences réglementaires. Notre pari est asymétrique avec des signaux d'alerte sur la trésorerie et la transparence des ventes nettes, nécessitant une diligence renforcée avant le premier appel.</a:t>
+              <a:t>Dans la catégorie des 'Aspirants', nous avons un grand nombre d'entreprises, 19 au total, incluant Tebi, Katanox et Hotelverse. Ces acteurs cherchent à croître de manière opportuniste, souvent avec des capacités financières plus limitées que les prédateurs. Ils peuvent être des startups innovantes cherchant à consolider leur technologie ou à s'intégrer dans des écosystèmes plus vastes. Ce sont des cibles potentielles ou des partenaires pour des entreprises plus grandes.</a:t>
             </a:r>
           </a:p>
         </p:txBody>
@@ -1726,7 +1726,7 @@
           <a:lstStyle/>
           <a:p>
             <a:r>
-              <a:t>L'analyse SWOT de Katanox révèle plusieurs points clés. Parmi les forces, Paul Beukers apporte une expertise directe des paiements B2B d'Adyen, et le fondateur excelle en exécution. Katanox est positionnée dans l'étape 3 de la chaîne de valeur hôtelière avec un score stratégique exceptionnel de 8,0. Les licences PSD2 et FCA sont un atout réglementaire majeur, et les partenariats récents accélèrent la connectivité. Côté faiblesses, le leadership du fondateur est individuel, le financement seed limite la trésorerie, il y a un manque de chiffres de revenus publics, et la stratégie de croissance dépend des partenariats sans M&amp;A clair. La structure remote-first doit prouver son efficacité scalée. Ces éléments doivent être pris en compte pour maximiser les opportunités.</a:t>
+              <a:t>Les 'Géants' sont Adyen, Cloudbeds et Shiji Group. Malgré leurs ressources considérables, ils se concentrent sur la croissance organique ou les partenariats plutôt que sur les acquisitions agressives. Ils agissent comme des forteresses, renforçant leurs positions existantes et optimisant leurs produits. Leur posture passive sur le front des M&amp;A ne signifie pas inactivité, mais une priorisation différente.</a:t>
             </a:r>
           </a:p>
         </p:txBody>
@@ -1796,7 +1796,7 @@
           <a:lstStyle/>
           <a:p>
             <a:r>
-              <a:t>Les opportunités sont significatives. Le marché TAM de 2,9 milliards USD croît à 19-20% CAGR. Le lancement de Katanox Capital offre des marges élevées sur les avances de fonds. Les hubs à New York et Londres ouvrent les marchés nord-américains et britanniques sous-exploités. L'intégration de l'IA booste la distribution directe, et le remplacement des commissions VCC libère du capital de roulement. Cependant, des menaces subsistent. La concurrence directe de Mews Payments et Worldline est intense. Les intégrations natives chez Oracle Hospitality érodent le besoin de plateformes tierces. Les changements réglementaires comme Wero ou EPI peuvent disrupter les rails de paiement, et un ralentissement du travel peut réduire les volumes. La dépendance aux intégrations PMS expose à des ruptures de partenariats clés.</a:t>
+              <a:t>Enfin, les 'Cibles Potentielles' sont Canary Technologies, la Banque de France et Trevium. Ces entreprises, souvent avec une capacité moindre ou une posture passive, pourraient être des cibles d'acquisition ou des partenaires stratégiques. La Banque de France, en tant qu'institution, est une cible unique. Canary Technologies, malgré son financement, privilégie la croissance organique, la rendant potentiellement attractive pour des acquisitions.</a:t>
             </a:r>
           </a:p>
         </p:txBody>
@@ -1866,7 +1866,7 @@
           <a:lstStyle/>
           <a:p>
             <a:r>
-              <a:t>Notre plan d'action stratégique pour Katanox est structuré en quatre piliers. D'abord, la Défense : renforcer les effets de réseau via une connectivité unique à des centaines de partenaires et consolider les intégrations PMS pour protéger le moat réglementaire. Ensuite, l'Offensive : exploiter l'expertise Adyen du fondateur pour scaler Katanox Capital et viser 5% du SAM européen, tout en expandissant sur le marché NA via le hub de New York. Le Coup de Grâce serait un échec à sécuriser les intégrations PMS et un épuisement rapide du cash post-récession, laissant le terrain aux concurrents. Enfin, la Remédiation : recruter un Head of People pour gérer le scale culturel et prouver une traction revenus &gt;10 millions USD via Katanox Capital pour sécuriser la trésorerie.</a:t>
+              <a:t>Les scénarios stratégiques révèlent des mouvements complexes d'alliances, d'acquisitions et de confrontations. Les batailles d'acquisition pour Katanox et Canary Technologies sont au cœur des préoccupations. Des alliances inévitables entre Mews et Katanox pourraient dominer les paiements directs. Des menaces d'étranglement pèsent sur Katanox de la part d'Oracle et Mews. Ces dynamiques définissent le futur du paysage concurrentiel.</a:t>
             </a:r>
           </a:p>
         </p:txBody>
@@ -1936,7 +1936,7 @@
           <a:lstStyle/>
           <a:p>
             <a:r>
-              <a:t>Dans cette thèse d'investissement, Katanox s'inscrit principalement dans l'angle du "Paiement, réconciliation et récupération TVA pour le voyage d'affaires". Sa logique est directe : avec des licences PSD2 et FCA, Katanox opère des flux de paiement B2B hôteliers via compte-à-compte, répondant aux besoins de réconciliation et de liquidité de notre thèse S4BT. Le marché de l'infrastructure financière automatisée pour l'hôtellerie en Europe est en pleine consolidation, justifiant une action rapide. Le timing est clé car la PSD2 et les nouvelles obligations de facturation électronique poussent à abandonner les réconciliations manuelles, et l'arrivée de concurrents comme TravelPerk avec des offres de paiement complètes nous presse. La société, fondée en 2020 avec 6,06 millions de dollars levés en Seed, a des atouts stratégiques solides, mais nécessite des clarifications sur sa santé financière et ses certifications PCI-DSS. Son fondateur, Paul Beukers, est un "Missionary" avec une expertise unique des paiements B2B et un profil d'exécution très puissant. L'adéquation avec notre thèse est forte sur l'angle des paiements et la synergie financière des économies sur les commissions VCC est immédiate et considérable. Cependant, le verdict reste "CONSIDER (M&amp;A)" car des blocages d'exécution subsistent, notamment sur la certification PCI-DSS et le module TVA multi-juridictionnelle qui doivent être résolus avant tout engagement ferme. Nous devons approfondir ces points.</a:t>
+              <a:t>Ce diagramme résume un ensemble de scénarios stratégiques hypothétiques, mais basés sur des signaux de marché réels. On voit que Katanox est au centre de plusieurs dynamiques, notamment des batailles d'acquisition et des synergies potentielles avec de grands acteurs. Cette visualisation nous aide à anticiper les mouvements stratégiques et à positionner Katanox dans ce jeu d'échecs M&amp;A. Le sujet est brûlant et les opportunités, comme les menaces, sont nombreuses.</a:t>
             </a:r>
           </a:p>
         </p:txBody>
@@ -2006,7 +2006,7 @@
           <a:lstStyle/>
           <a:p>
             <a:r>
-              <a:t>Le verdict final est "CONSIDER" pour l'acquisition de Katanox. La logique stratégique est robuste : Katanox permettrait à S4BT d'économiser 100 à 150 millions d'euros par an en évitant les commissions VCC sur nos 5 milliards d'euros de volume de réservations. L'entreprise apporte des licences réglementaires FCA et PSD2, et des connecteurs PMS préétablis. Ce deal offre une défense stratégique contre des concurrents comme TravelPerk qui cherchent à unifier les paiements. Le prix indicatif de 13 à 19 millions d'euros est largement justifié par les économies sur les seules trois premières années. Cependant, deux points critiques nous empêchent de passer à "Conviction" à ce stade : l'absence de certification PCI-DSS documentée et le manque d'un module TVA multi-juridictionnelle. Ces conditions nécessitent une remédiation post-acquisition et doivent être clarifiées pour nous engager pleinement. Nous recommandons d'engager une vérification préliminaire sur ces points sous trente jours.</a:t>
+              <a:t>Passons maintenant à l'analyse plus concrète de Katanox. Nous allons explorer en détail sa proposition de valeur, son produit, son modèle économique, et bien sûr, l'équipe qui la porte. Cette section est essentielle pour comprendre la raison d'être de Katanox et son potentiel à transformer le marché de l'hôtellerie.</a:t>
             </a:r>
           </a:p>
         </p:txBody>
@@ -2076,7 +2076,7 @@
           <a:lstStyle/>
           <a:p>
             <a:r>
-              <a:t>Dans cette première partie, nous allons plonger au cœur du marché de Katanox. Nous explorerons la taille de ce marché, sa structure, les principaux acteurs qui s'y déploient, et les dynamiques de fond qui le façonnent. L'objectif est de comprendre en profondeur l'environnement dans lequel évolue cette fintech et d'identifier les vecteurs de croissance et les points de contrôle stratégiques qui pourraient justifier notre investissement. C'est ici que nous évaluerons la pertinence et le potentiel de l'empreinte de Katanox dans l'écosystème hôtelier. Nous commencerons par une analyse quantitative de la taille du marché.</a:t>
+              <a:t>Passons à la question cruciale : Katanox, un 'Call' ou un 'Pass' pour notre pipeline M&amp;A ? Sur la base de notre score de pré-sélection, Katanox obtient un 78/100, ce qui la positionne dans la catégorie 'Signal Mixte'. Notre verdict est un 'Consider (M&amp;A)'. Cela signifie que le dossier présente un intérêt stratégique certain, mais nécessite une due diligence approfondie et la levée de plusieurs conditions suspensives avant de pouvoir passer en 'Conviction'. Des challenges importants subsistent notamment sur la résilience du modèle et la couverture fonctionnelle par rapport à notre thèse. Nous allons détailler pourquoi.</a:t>
             </a:r>
           </a:p>
         </p:txBody>
@@ -2146,7 +2146,7 @@
           <a:lstStyle/>
           <a:p>
             <a:r>
-              <a:t>Dans cette section, nous analysons la valorisation de Katanox. Actuellement, l'ARR Y1 est estimé à 2,6 M€ et l'EBITDA Y1 à 0,1 M€. À partir des comparables sectoriels, la valorisation par multiples d'EV/CA est de 14,2 M€. La méthode DCF standalone n'est pas pertinente car la somme des FCF actualisés est négative, ce qui est courant pour une cible en hypercroissance. La médiane de négociation se situe donc à 14,2 M€. Un MOIC de 2,19x et un IRR de 29,7% sont obtenus, ce qui est supérieur à nos seuils de 1,1x et 10%. Ce deal est donc défendable en comité, mais la confiance sur l'ARR reste faible, et doit être challengée avant engagement.</a:t>
+              <a:t>La proposition de valeur de Katanox est claire : elle veut remplacer les réseaux de cartes obsolètes de l'hôtellerie par des paiements directs de compte à compte, agissant comme un moteur de croissance pour le voyage. Son ICP se compose d'hôtels, de groupes hôteliers et d'agences de voyages. Katanox est une plateforme B2B opérant dans la FinTech, spécifiquement l'infrastructure financière automatisée pour l'hôtellerie. L'entreprise est basée à Amsterdam, Londres et New York, et a déjà attiré des clients clés comme Travelodge et Wyndham Hotels.</a:t>
             </a:r>
           </a:p>
         </p:txBody>
@@ -2216,7 +2216,7 @@
           <a:lstStyle/>
           <a:p>
             <a:r>
-              <a:t>Nos prévisions financières tablent sur une croissance des revenus de 32,5% la première année, puis une décélération progressive jusqu'à 17% en année cinq. La marge brute reste solide à 73%. Au-delà de ces chiffres, ce qui est crucial, c'est l'impact des synergies M&amp;A. Par exemple, les économies sur les commissions VCC pourraient apporter jusqu'à 4,46 M€ en année cinq. Ces contributions additionnelles transformeront radicalement le compte de résultat post-acquisition. Les OPEX seront maîtrisés pour soutenir cette croissance. Nous prévoyons une très nette amélioration de l'EBITDA, qui sera positive dès la première année post-intégration.</a:t>
+              <a:t>La solution de Katanox est une plateforme unifiée qui automatise les paiements, les règlements et la distribution sans intermédiaires. Parmi ses fonctionnalités clés, on trouve les paiements de compte à compte, la réconciliation des commissions, la gestion des stocks en direct et le 'Katanox Capital' pour la liquidité. Techniquement, elle repose sur une infrastructure financière intégrée via API-first, avec des licences PSD2 et FCA, assurant sécurité et conformité. Les cas d'utilisation incluent l'élimination des commissions VCC et l'automatisation des transactions B2B.</a:t>
             </a:r>
           </a:p>
         </p:txBody>
@@ -2286,7 +2286,7 @@
           <a:lstStyle/>
           <a:p>
             <a:r>
-              <a:t>Concernant le tableau des flux de trésorerie, le FCF standalone est négatif jusqu'en année 5, ce qui est typique pour une startup en croissance intensive. Cependant, l'intégration des synergies bascule ce FCF en positif dès la première année, atteignant environ 6,65 M€ en année 5, et un cumul de 22,72 M€ sur 5 ans. Cette amélioration significative de la trésorerie prouve la pertinence stratégique et financière de l'acquisition. C'est l'effet transformateur des synergies qui rend ce deal particulièrement attractif, générant un cash flow substantiel là où la cible seule consommerait encore du cash. Ce FCF positif valide la thèse d'acquisition.</a:t>
+              <a:t>Le modèle économique de Katanox est hybride : un SaaS avec des services financiers intégrés. La rentabilité est générée par des commissions sur les transactions, des frais sur les avances de fonds (Katanox Capital) et des frais d'accès à la plateforme de distribution. L'ARPU est estimé à environ 2 000 euros annuels par propriété, avec une fourchette entre 1 140 et 3 000 euros. Ce modèle vise à solidifier les revenus récurrents et à valoriser chaque module. Le détail des plans tarifaires spécifiques n'est pas encore public.</a:t>
             </a:r>
           </a:p>
         </p:txBody>
@@ -2356,7 +2356,7 @@
           <a:lstStyle/>
           <a:p>
             <a:r>
-              <a:t>L'analyse de valorisation selon le cadre Damodaran révèle une Acquisition Value de 31,19 M€. Cette valeur est le reflet de la Standalone Value de la cible, à laquelle s'ajoutent les synergies nettes de 16,95 M€ que nous pourrions générer. Le MOIC du deal est de 2,19x, et l'IRR de 29,7%. Ces chiffres dépassent nos hurdles respectifs de 1,10x et 10%, rendant ce deal éminemment défendable en comité d'investissement. Il est important de noter que tout l'upside de cette opération provient des synergies, ce qui met en lumière la pertinence de Katanox dans notre portefeuille. Le prix et les rendements sont solides, même avec le facteur de conviction "CONSIDER".</a:t>
+              <a:t>L'équipe de Katanox se distingue par une forte culture d'entreprise, orientée vers l'efficacité et la collaboration. Le leadership est structuré autour de hubs internationaux à Amsterdam, Londres et New York. L'effectif est estimé entre 50 et 150 employés. Ces chiffres et cette organisation sont cruciaux pour une scale-up ayant des ambitions aussi vastes. Le défi ici est de maintenir la cohérence et la culture d'entreprise avec une équipe répartie sur plusieurs fuseaux horaires.</a:t>
             </a:r>
           </a:p>
         </p:txBody>
@@ -2426,7 +2426,7 @@
           <a:lstStyle/>
           <a:p>
             <a:r>
-              <a:t>Nos matrices de sensibilité confirment la robustesse du deal même sous des hypothèses plus conservatrices. Le MOIC se maintient au-dessus de notre hurdle de 1,10x, même avec un taux de capture des synergies réduit à 30% et un risque d'intégration poussé à 25%. De même, l'IRR reste bien au-delà de 10% dans presque tous les scénarios. Cela démontre que notre évaluation est résiliente aux aléas et aux incertitudes liées à l'intégration. La valeur du deal est donc bien ancrée, même si la réalisation de toutes les synergies prendrait du temps et des efforts importants. Ces matrices nous donnent une confiance accrue dans la décision d'aller de l'avant, sous réserve des clarifications demandées. Nous sommes à l'aise sur une large gamme de scénarios.</a:t>
+              <a:t>Paul Beukers, CCO et co-fondateur, est l'un des piliers de Katanox. Son pedigree chez Adyen, où il a géré des comptes d'envergure et dirigé le développement produit, lui confère une expertise unique dans les paiements B2B et l'optimisation des processus. Son parcours est celui d'un opérateur commercial qui a su adapter son savoir-faire à l'hôtellerie. Son score ADN est de 84/100, avec une exécution à 90/100, ce qui est très impressionnant. Son point aveugle potentiel réside dans le leadership multiplicateur, moins dans la performance individuelle.</a:t>
             </a:r>
           </a:p>
         </p:txBody>
@@ -2496,7 +2496,7 @@
           <a:lstStyle/>
           <a:p>
             <a:r>
-              <a:t>L'analyse des transactions comparables nous permet d'ancrer notre valorisation. Les transactions récentes dans le secteur montrent un multiple EV/CA médian de 3,0x. Après ajustement pour la qualité de Katanox (quality score de 0,45), nous appliquons un multiple de 5,5x sur l'ARR, ce qui nous donne une Entry EV impliquée de 14,22 M€. Le multiple EV/EBITDA est moins pertinent ici en raison du niveau de rentabilité actuel de Katanox. Cette approche par comparables est essentielle pour aligner notre valorisation sur les pratiques de marché et confirmer la justesse de notre offre. C'est un point de repère solide dans notre processus d'évaluation.</a:t>
+              <a:t>En résumé, Katanox est une FinTech d'infrastructure financière automatisée pour l'hôtellerie qui s'attaque à un problème majeur : la réconciliation manuelle des cartes de crédit virtuelles coûte jusqu'à 3% de la marge nette. Leur solution, une plateforme API-first, connecte directement les systèmes de réservation des hôtels aux comptes bancaires B2B, permettant un versement instantané. L'équipe, menée par Paul Beukers, a un fort potentiel, et le marché est en pleine croissance. Notre score de pré-sélection est de 78/100, un 'Signal Mixte' qui justifie un 'Consider (M&amp;A)'.</a:t>
             </a:r>
           </a:p>
         </p:txBody>
@@ -2566,7 +2566,7 @@
           <a:lstStyle/>
           <a:p>
             <a:r>
-              <a:t>L'analyse de marché top-down de Katanox révèle un TAM global de 2,9 milliards USD pour les plateformes d'orchestration de paiements hôteliers. Notre SAM européen est estimé à 0,85 milliard USD, soit environ 765 millions d'euros. Sur cette base, nous avons fixé un SOM à 42,5 millions USD, représentant un objectif réaliste de 5% du SAM pour les premières années d'une startup early-stage. Ces chiffres, bien que robustes et vérifiés par des rapports comme ceux de GM Insights, soulignent l'ampleur de l'opportunité de marché mais aussi l'importance de cibler spécifiquement le segment européen pour maximiser notre pénétration.</a:t>
+              <a:t>Voici l'index de notre présentation. Nous allons d'abord explorer la dynamique du marché, puis plonger dans l'analyse de l'entreprise Katanox elle-même. Ensuite, nous procéderons à une évaluation stratégique de sa proposition. La quatrième partie sera dédiée à notre thèse d'investissement et comment Katanox s'y intègre. Enfin, nous aborderons les aspects financiers et notre conviction, avant de conclure. Chacune de ces sections est conçue pour nous donner une vision complète et étayée du potentiel d'acquisition.</a:t>
             </a:r>
           </a:p>
         </p:txBody>
@@ -2636,7 +2636,7 @@
           <a:lstStyle/>
           <a:p>
             <a:r>
-              <a:t>En complément, l'approche bottom-up confirme la robustesse de nos estimations. En nous basant sur 50 000 établissements hôteliers européens comme clients potentiels et un ARPU annuel moyen de 2 000 € par propriété pour les solutions d'infrastructure financière automatisée, nous arrivons à un marché adressable de service de 100 millions €. Cette vision plus granulaire et calculée renforce la crédibilité des chiffres du SAM obtenus par l'approche top-down, même si elle tend à être plus conservative. C'est cette validation mutuelle qui nous donne confiance dans le potentiel de Katanox.</a:t>
+              <a:t>Le marché de l'infrastructure financière automatisée pour l'hôtellerie est l'un des plus dynamiques du secteur. Ce segment représente aujourd'hui une opportunité considérable pour les acteurs capables de résoudre les inefficiences historiques liées aux paiements et à la distribution. Katanox évolue précisément dans cet espace, en proposant des solutions qui répondent à des besoins pressants du marché. Nous allons voir en détail les chiffres de ce marché, sa chaîne de valeur et les acteurs clés qui y opèrent.</a:t>
             </a:r>
           </a:p>
         </p:txBody>
@@ -2706,7 +2706,7 @@
           <a:lstStyle/>
           <a:p>
             <a:r>
-              <a:t>La triangulation de nos analyses top-down et bottom-up confirme la convergence en ordre de grandeur des estimations de marché. Le SAM européen se situe entre 0,85 milliard USD et 100 millions €, un écart qui s'explique par les méthodes de calcul des proxies unitaires. Malgré cette granularité, les deux approches valident la substantialité du marché adressable pour Katanox. Ces chiffres renforcent notre conviction que ce marché offre une réelle opportunité de croissance significatif pour une solution comme Katanox.</a:t>
+              <a:t>Pour évaluer la taille du marché, nous avons utilisé une approche de triangulation combinant une analyse 'Top-Down' et 'Bottom-Up'. L'approche Top-Down révèle un TAM mondial de 2,9 milliards de dollars, porté par un CAGR de 19-20%. Le marché européen représente déjà 0,85 milliard de dollars, signalant une forte opportunité pour Katanox. Nous allons approfondir cette analyse sur les prochaines diapositives.</a:t>
             </a:r>
           </a:p>
         </p:txBody>
@@ -2776,7 +2776,7 @@
           <a:lstStyle/>
           <a:p>
             <a:r>
-              <a:t>Passons à la chaîne de valeur. Cette slide détaille les différentes étapes du processus d'infrastructure financière pour l'hôtellerie. Chacune de ces étapes est analysée selon son score stratégique. Nous commençons par le financement et la gestion de trésorerie, puis nous passons à la facturation et au revenue management, les paiements directs, la réconciliation, l'intégration des systèmes, et enfin le pilotage de la performance. Comprendre ces étapes est crucial car cela nous permet d'identifier où Katanox se positionne et où se trouvent les leviers de valeur les plus importants. Nous allons maintenant détailler chaque étape.</a:t>
+              <a:t>Notre analyse Top-Down, effectuée à partir d'entonnoirs de marché, révèle un Marché Total Adressable (TAM) de 2,9 milliards USD pour les plateformes d'orchestration de paiements hôteliers. Notre Marché Adressable de Service (SAM) en Europe s'élève à 0,85 milliard USD, représentant la part spécifique à Katanox. Enfin, notre Marché Obtenable de Service (SOM), l'objectif réaliste à court terme pour Katanox, est fixé à 42,5 millions USD. Ces chiffres montrent un marché vaste et en forte croissance, avec une part significative à conquérir.</a:t>
             </a:r>
           </a:p>
         </p:txBody>
@@ -2846,7 +2846,7 @@
           <a:lstStyle/>
           <a:p>
             <a:r>
-              <a:t>La première étape, Financement et Gestion de Trésorerie, obtient un score stratégique de 6,2. Sa défendabilité est forte grâce aux exigences en capital et aux barrières réglementaires. Le potentiel de marge est modéré, autour de 40-70%, en raison de la dépendance aux normes bancaires. Cependant, le potentiel de croissance est élevé, estimé à 19-20% de CAGR d'ici 2034, porté par la numérisation. Cette étape est cruciale pour les flux de trésorerie initiaux, mais les startups peinent à y pénétrer sans capitaux massifs. Banque de France et Ruby sont des acteurs clés. Elle est attractive, mais vise davantage les acteurs établis que les jeunes pousses.</a:t>
+              <a:t>L'approche Bottom-Up, basée sur le nombre de clients potentiels et l'économie unitaire, nous donne une perspective complémentaire. En Europe, nous estimons 50 000 établissements hôteliers potentiellement clients, avec un prix moyen annuel de 2 000 € par propriété. Cela nous mène à un Marché Adressable de Service de 100 millions d'euros. Cette estimation, bien que plus conservatrice, valide l'ordre de grandeur des chiffres Top-Down.</a:t>
             </a:r>
           </a:p>
         </p:txBody>
@@ -2916,7 +2916,7 @@
           <a:lstStyle/>
           <a:p>
             <a:r>
-              <a:t>L'étape de Facturation et Revenue Management est stratégiquement exceptionnelle avec un score de 8,1. Sa défendabilité est très forte (7,5) grâce à l'IP sur les algorithmes d'IA et aux coûts de changement élevés liés aux PMS. Le potentiel de marge est également excellent (8), avec des marges brutes SaaS de plus de 70 %, grâce à sa scalabilité. Enfin, la croissance est remarquable (9), avec un CAGR de 16-20%, portée par l'adoption rapide de l'IA. Des acteurs comme Veridian et Atomize y sont dominants. C'est une étape très attractive pour l'investissement, offrant un moat technique et des marges élevées.</a:t>
+              <a:t>En comparant les deux approches, on constate une convergence satisfaisante. Le Top-Down indique un SAM européen d'environ 765 millions d'euros, tandis que le Bottom-Up donne 100 millions d'euros. L'écart Bottom-Up étant plus conservateur, cela valide la robustesse de l'estimation de l'ordre de grandeur du marché. Cette triangulation renforce notre confiance dans le potentiel de marché global pour Katanox. Le marché est bel et bien là et il est substantiel.</a:t>
             </a:r>
           </a:p>
         </p:txBody>

--- a/katanox-deck.pptx
+++ b/katanox-deck.pptx
@@ -536,7 +536,7 @@
           <a:lstStyle/>
           <a:p>
             <a:r>
-              <a:t>Bonjour à tous, et bienvenue. Aujourd'hui, nous allons nous pencher sur Katanox, une fintech qui opère dans l'infrastructure financière automatisée pour le secteur de l'hôtellerie. Notre objectif est de déterminer si Katanox représente une cible d'acquisition stratégique. Nous analyserons en profondeur son positionnement sur le marché, son modèle économique, les forces et faiblesses de son équipe, ainsi que les synergies potentielles. Notre objectif est de voir si cette entreprise, spécialisée dans les paiements B2B et la distribution hôtelière directe, s'aligne sur notre thèse d'investissement et peut créer une valeur significative pour notre groupe. Accrochez-vous, l'analyse est détaillée.</a:t>
+              <a:t>Bonjour et bienvenue à cette présentation sur Katanox, une cible d'investissement stratégique dans le secteur de l'infrastructure financière automatisée pour l'hôtellerie. Katanox est une plateforme SaaS qui vise à révolutionner les paiements directs et la distribution dans l'industrie hôtelière en Europe et en Amérique du Nord. Nous allons explorer en détail pourquoi cette entreprise pourrait être un ajout clé à notre portefeuille.</a:t>
             </a:r>
           </a:p>
         </p:txBody>
@@ -606,7 +606,7 @@
           <a:lstStyle/>
           <a:p>
             <a:r>
-              <a:t>Le marché de Katanox s’inscrit dans une chaîne de valeur composée de six étapes distinctes, depuis la gestion des flux de trésorerie initiaux jusqu'au pilotage de la performance. Chaque étape a été scrupuleusement analysée pour sa défendabilité, son potentiel de marge et sa croissance. Nous allons maintenant examiner les détails de chaque étape et identifier les positions clés qui offrent le plus grand avantage stratégique.</a:t>
+              <a:t>Le marché de Katanox connaît une croissance explosive, principalement grâce à l'adoption des paiements PAI et à l'unification européenne via Wero/EPI. Le TAM mondial atteindra 2,9 milliards USD en 2024, avec un CAGR de 19-20%. Cette dynamique transforme la gestion des paiements hôteliers et crée une fenêtre d'opportunité unique pour les plateformes innovantes comme Katanox.</a:t>
             </a:r>
           </a:p>
         </p:txBody>
@@ -676,7 +676,7 @@
           <a:lstStyle/>
           <a:p>
             <a:r>
-              <a:t>Voici la chaîne de valeur que nous avons identifiée pour l'infrastructure financière automatisée de l'hôtellerie, avec les scores stratégiques pour chaque étape. Les étapes les plus attractives sont la facturation et le revenue management à 8.1, suivie de près par les paiements et règlements directs à 8.0 et l'intégration et l'orchestration à 7.2. Les étapes Finance &amp; Trésorerie et Réconciliation &amp; Conformité sont solides, tandis que le Pilotage de la Performance est moins stratégique. Katanox, comme nous allons le voir, se positionne stratégiquement sur plusieurs de ces étapes clés.</a:t>
+              <a:t>Les étapes à fortes marges SaaS comme la facturation, les paiements directs et l'intégration génèrent l'essentiel de la valeur. Le déplacement concurrentiel est marqué par l'obsolescence des acteurs FP&amp;A généralistes, incapables de répondre aux besoins spécialisés de l'hôtellerie. L'économie unitaire évolue vers un modèle SaaS par propriété, ce qui favorise la scalabilité et la captation de valeur.</a:t>
             </a:r>
           </a:p>
         </p:txBody>
@@ -746,7 +746,7 @@
           <a:lstStyle/>
           <a:p>
             <a:r>
-              <a:t>Notre analyse des trois meilleures positions stratégiques dans cette chaîne de valeur confirme les opportunités les plus prometteuses. Le Rang 1 est la Facturation et le Revenue Management, avec un score exceptionnel de 8.1. Le Rang 2 est les Paiements et Règlements Directs, également exceptionnel à 8.0. Le Rang 3 est l'Intégration et l'Orchestration à 7.2. Katanox se positionne idéalement sur le deuxième et le troisième rang, ce qui est très pertinent pour notre thèse.</a:t>
+              <a:t>Le Magic Quadrant des concurrents est un outil clé pour comprendre le positionnement des acteurs sur le marché. Nous distinguons les Leaders Établis, Innovateurs Émergents, Produits Commoditisés et Early Undifferentiated. Katanox se situe parmi les Innovateurs Émergents.</a:t>
             </a:r>
           </a:p>
         </p:txBody>
@@ -816,7 +816,7 @@
           <a:lstStyle/>
           <a:p>
             <a:r>
-              <a:t>La Facturation et le Revenue Management (Score 8.1) est en tête grâce à l'IA, à des marges SaaS élevées et à une croissance entre 16-20% CAGR. La défendabilité forte via des algorithmes propriétaires et des coûts de changement élevés la rend attractive. Les Paiements et Règlements Directs (Score 8.0) est clé par sa défendabilité via effets de réseau et conformité (PSD2/PCI), des marges premiums avec ARPU élevé, et une croissance forte (+19% CAGR). L'Intégration et l'Orchestration (Score 7.2) bénéficie de marges élevées pour les APIs cloud et d'une croissance de 20% CAGR des PMS, avec une défendabilité via son écosystème de partenaires. Ces étapes sont la colonne vertébrale des opportunités d'investissement actuelles dans ce secteur.</a:t>
+              <a:t>Notre analyse du Magic Quadrant révèle trois Leaders Établis : Canary Technologies, Mews et Tebi. Ces entreprises sont matures et se distinguent par leur innovation et leur solidité financière. Katanox, Hotelverse et Horago sont des Innovateurs Émergents, montrant un fort potentiel mais à un stade de maturité plus précoce, ce qui les rend attractifs pour des acquisitions.</a:t>
             </a:r>
           </a:p>
         </p:txBody>
@@ -886,7 +886,7 @@
           <a:lstStyle/>
           <a:p>
             <a:r>
-              <a:t>Le marché de l'orchestration des paiements hôteliers est en pleine explosion, propulsé par plusieurs tendances macroéconomiques. La digitalisation post-COVID, l'émergence des wallets numériques, et l'unification européenne des paiements via Wero/EPI agissent comme de puissants catalyseurs. Le TAM mondial atteint 2,9 milliards USD avec un CAGR de 19-20%. Le goulet d'étranglement critique réside dans l'étape des paiements et règlements directs, qui détient un pouvoir de tarification disproportionné. Les acteurs généralistes perdent du terrain au profit de SaaS verticaux spécialisés. Le pool de profits se déplace vers les étapes à fortes marges SaaS.</a:t>
+              <a:t>Le quadrant M&amp;A des concurrents révèle notre approche stratégique. Nous identifions les prédateurs, les aspirants, les géants et les cibles potentielles. Katanox est un aspirant, une position qui suggère à la fois un potentiel de croissance et une vulnérabilité aux stratégies d'acquisition des grands acteurs.</a:t>
             </a:r>
           </a:p>
         </p:txBody>
@@ -956,7 +956,7 @@
           <a:lstStyle/>
           <a:p>
             <a:r>
-              <a:t>Le graphique illustre l'explosion de l'orchestration des paiements en hôtellerie. L'adoption des paiements PAI, l'intégration PMS/ERP et l'unification européenne via Wero/EPI catalysent le passage à la gestion automatisée. Le marché total adressable de 2,9 milliards USD avec un CAGR de 19-20% témoigne d'une croissance rapide. Le goulet d'étranglement critique se situe au niveau des paiements et règlements directs, un point pivot pour la capture de valeur. Les acteurs généralistes sont dépassés, la valeur se déplaçant vers des SaaS verticaux qui optimisent l'économie unitaire.</a:t>
+              <a:t>Les prédateurs, comme Oracle Hospitality et Stripe, ont une forte capacité financière et une posture agressive d'acquisition. Les aspirants, dont Katanox, sont actifs mais avec une capacité d'acquisition plus limitée, cherchant à saisir des opportunités. Les géants, comme Adyen, privilégient la croissance organique. Les cibles potentielles, comme Canary Technologies, sont défensives mais représentent des actifs stratégiques pour des acquéreurs plus importants.</a:t>
             </a:r>
           </a:p>
         </p:txBody>
@@ -1026,7 +1026,7 @@
           <a:lstStyle/>
           <a:p>
             <a:r>
-              <a:t>Dans l'écosystème hôtelier, les acteurs sont classés selon leur taille et leur positionnement stratégique. Nous observons des géants mondiaux comme la Banque de France et Adyen, ainsi que des scale-ups agressives comme Mews et Tebi, et une multitude de startups niches. Katanox se situe dans la catégorie des Innovateurs Émergents et Aspirants. Comprendre ce paysage est essentiel pour identifier les opportunités d'alliances ou d'acquisitions.</a:t>
+              <a:t>Nous avons identifié plusieurs scénarios stratégiques. Des batailles d'acquisition pour Katanox, impliquant Oracle et Mews, des alliances inévitables avec Mews, et des menaces d'étranglement par les grands. Ces scénarios mettent en lumière le rôle pivot de Katanox et la forte dynamique concurrentielle du marché.</a:t>
             </a:r>
           </a:p>
         </p:txBody>
@@ -1096,7 +1096,7 @@
           <a:lstStyle/>
           <a:p>
             <a:r>
-              <a:t>Voici la répartition des principaux acteurs de la chaîne de valeur. On observe des Global Giants comme la Banque de France et Adyen, des Large Players comme Worldline et Shiji Group, des Medium Players comme Cloudbeds. Mais aussi de nombreuses Scale-Ups et Niche Players tels Mews, Tebi, Canary Technologies, et bien sûr Katanox. Ces catégories nous aident à mieux comprendre les dynamiques de marché, les forces en présence, et les opportunités pour une entreprise comme Katanox.</a:t>
+              <a:t>Le tableau des synergies révèle la valeur potentielle de Katanox. Les synergies les plus élevées se concentrent autour de Katanox, ce qui en fait un actif central. Les scénarios de consolidation et d'acquisition décisive génèrent des millions de revenus ou d'économies. Cela montre que Katanox est une pièce maîtresse pour structurer le marché des paiements hôteliers directs.</a:t>
             </a:r>
           </a:p>
         </p:txBody>
@@ -1166,7 +1166,7 @@
           <a:lstStyle/>
           <a:p>
             <a:r>
-              <a:t>Le Magic Quadrant classifie les entreprises selon leur maturité et leur différenciation. Nous avons identifié 3 'Leaders Établis', 3 'Innovateurs Émergents', et 10 'Early Undifferentiated'. Il n'y a pas d'acteurs matures commoditisés identifiés. Katanox se positionne parmi les innovateurs émergents, ce qui signifie un fort potentiel d'innovation mais un besoin de scaler pour atteindre la pleine maturité. C’est la classification que l’on retrouve souvent pour de jeunes entreprises prometteuses.</a:t>
+              <a:t>La stratégie de Katanox est de devenir un moteur de croissance dans le secteur du voyage en unifiant la distribution directe et l'infrastructure financière. Trois piliers : la désintermédiation des paiements, la finance embarquée pour le fonds de roulement, et la connectivité unifiée des inventaires via API. Les cibles d'acquisition potentielles pour Katanox se situent dans la gamme de 0,5 à 15 millions d'ARR, des startups en phase Seed à Série B, opérant dans des modèles SaaS ou transactionnels en Europe et Amérique du Nord.</a:t>
             </a:r>
           </a:p>
         </p:txBody>
@@ -1236,7 +1236,7 @@
           <a:lstStyle/>
           <a:p>
             <a:r>
-              <a:t>Dans le quadrant des Leaders Établis, nous trouvons Mews, Canary Technologies et Tebi. Ce sont des entreprises matures avec une forte différenciation. Elles se distinguent par des plateformes SaaS complètes, des algorithmes propriétaires et des financements substantiels, ce qui leur permet de dominer des segments spécifiques du marché. Ils sont souvent des cibles pour des partenariats ou des acquisitions ou, comme Mews, des prédateurs eux-mêmes.</a:t>
+              <a:t>Katanox est une infrastructure financière et une plateforme de distribution pour l'hôtellerie, dont la mission est de remplacer les réseaux de cartes obsolètes par des paiements de compte à compte. Le profil client idéal inclut les hôtels, groupes hôteliers et agences de voyages. Katanox opère en B2B dans le secteur de la FinTech et de l'Hospitality. L'entreprise est basée à Amsterdam, Londres et New York, fondée en 2020 et a levé 5,7 millions d'euros en Seed en 2022.</a:t>
             </a:r>
           </a:p>
         </p:txBody>
@@ -1306,7 +1306,7 @@
           <a:lstStyle/>
           <a:p>
             <a:r>
-              <a:t>Katanox est une plateforme SaaS qui propose une infrastructure financière pour les règlements directs et la distribution automatisée dans l'industrie hôtelière, principalement en Europe et en Amérique du Nord. Leur mission est de remplacer les systèmes actuels de paiement coûteux et inefficaces par une solution plus directe et automatisée. En somme, Katanox aide les hôtels à recevoir leurs paiements des réservations directement et rapidement, en contournant les intermédiaires traditionnels et les frais élevés associés aux cartes de crédit. C'est une proposition de valeur très spécifique et très pertinente dans le contexte actuel de l'hôtellerie.</a:t>
+              <a:t>Le marché de Katanox est vaste avec un TAM évalué à 2,9 milliards de dollars, principalement axé sur les plateformes d'orchestration de paiements pour l'hôtellerie. Le SAM européen est de 0,85 milliard de dollars. Nous avons identifié un potentiel de marché réalisable à court terme de 42,5 millions de dollars, avec une croissance annuelle composée des revenus (CAGR) estimée entre 19 % et 20 % d'ici 2034. Ces chiffres montrent une opportunité significative.</a:t>
             </a:r>
           </a:p>
         </p:txBody>
@@ -1376,7 +1376,7 @@
           <a:lstStyle/>
           <a:p>
             <a:r>
-              <a:t>Les Innovateurs Émergents incluent Hotelverse, Katanox et Horago. Ces entreprises montrent un fort potentiel de différenciation grâce à des approches innovantes, mais elles sont encore à un stade de maturité précoce. Elles introduisent de nouvelles technologies ou modèles d'affaires dans l'infrastructure financière hôtelière. C’est dans ce quadrant que nous retrouvons Katanox, ce qui justifie notre intérêt particulier.</a:t>
+              <a:t>La solution principale de Katanox est une plateforme unifiée automatisant les paiements, règlements et distribution sans intermédiaires. Ses fonctionnalités incluent les paiements de compte à compte, la réconciliation des commissions, la gestion des stocks en direct, et les services Katanox Capital pour des avances de fonds. L'infrastructure est API-first, sécurisée PCI-DSS et conforme PSD2, garantissant une intégration fluide avec les systèmes existants.</a:t>
             </a:r>
           </a:p>
         </p:txBody>
@@ -1446,7 +1446,7 @@
           <a:lstStyle/>
           <a:p>
             <a:r>
-              <a:t>Dans le Magic Quadrant, aucun acteur n'est identifié comme 'Produits Commoditisés' (maturité élevée et faible différenciation), ce qui est un bon signe du dynamisme du marché. En revanche, le quadrant 'Early Undifferentiated' est peuplé de 10 entreprises, dont ROH, Folio, Prostay, Libeo, Phacet, Profitize, Veridian, Clock, Vitabyte et iOL Pay. Elles sont soit très jeunes, soit proposent des solutions encore peu différenciées. Cela suggère un marché en phase de consolidation avec beaucoup de petits acteurs.</a:t>
+              <a:t>Le modèle d'affaires de Katanox est hybride, combinant SaaS et services financiers intégrés. Les flux de revenus proviennent des frais sur les avances de fonds via Katanox Capital, des commissions sur les transactions, et des frais d'accès à la plateforme. L'ARPU est estimé entre 1 140 et 3 000 euros annuels par propriété, offrant une monétisation évolutive et des marges attrayantes.</a:t>
             </a:r>
           </a:p>
         </p:txBody>
@@ -1516,7 +1516,7 @@
           <a:lstStyle/>
           <a:p>
             <a:r>
-              <a:t>Le M&amp;A Quadrant nous aide à visualiser les dynamiques de fusion-acquisition dans l'écosystème. Nous avons des 'Prédateurs' comme Oracle et Stripe avec une forte capacité d'acquisition, des 'Aspirants' comme Tebi ou Katanox cherchant à croître, des 'Géants' comme Adyen qui privilégient la croissance organique, et des 'Cibles Potentielles' comme Canary Technologies ou la Banque de France. Se positionner dans ce quadrant permet de mieux anticiper les mouvements de marché.</a:t>
+              <a:t>L'équipe dirigeante de Katanox est solide, avec Paul Beukers, CCO et co-fondateur, issu d'Adyen. Son expérience en gestion de comptes stratégiques et en développement produit lui confère une expertise unique. La présence de Rob Torres, ancien MD de Google Travel, comme administrateur non exécutif renforce la crédibilité. L'équipe compte entre 50 et 150 employés répartis sur trois hubs internationaux, favorisant une culture hybride axée sur la transparence et l'efficacité.</a:t>
             </a:r>
           </a:p>
         </p:txBody>
@@ -1586,7 +1586,7 @@
           <a:lstStyle/>
           <a:p>
             <a:r>
-              <a:t>Ce quadrant M&amp;A met en lumière les 'Prédateurs' : Oracle Hospitality, Worldline, Stripe, IXOPAY et Mews. Ce sont des acteurs majeurs avec des capacités financières substantielles et une posture active d'acquisition. Ils recherchent des acquisitions pour consolider leur position ou étendre leur écosystème. Mews et IXOPAY, bien que plus petites, adoptent également une posture agressive. Comprendre leurs stratégies est essentiel pour Katanox.</a:t>
+              <a:t>Paul Beukers est un opérateur commercial et produit expérimenté, ayant construit son expertise chez Adyen avant de co-fonder Katanox. Son parcours montre une forte discipline, exécution et persévérance. Il a dirigé le développement de produits et la gestion de comptes clés, ce qui lui donne une vision profonde des inefficiences du marché des paiements B2B. Son ADN de fondateur est de 84/100, avec une exécution à 90/100, une discipline à 85/100 et une forte confiance en soi.</a:t>
             </a:r>
           </a:p>
         </p:txBody>
@@ -1656,7 +1656,7 @@
           <a:lstStyle/>
           <a:p>
             <a:r>
-              <a:t>Dans la catégorie des 'Aspirants', nous avons un grand nombre d'entreprises, 19 au total, incluant Tebi, Katanox et Hotelverse. Ces acteurs cherchent à croître de manière opportuniste, souvent avec des capacités financières plus limitées que les prédateurs. Ils peuvent être des startups innovantes cherchant à consolider leur technologie ou à s'intégrer dans des écosystèmes plus vastes. Ce sont des cibles potentielles ou des partenaires pour des entreprises plus grandes.</a:t>
+              <a:t>Voici un résumé de l'évaluation de Katanox. L'excellence de l'équipe, l'opportunité de marché, l'innovation produit et le modèle économique obtiennent tous un score élevé. La traction et la croissance, bien que solides, nécessitent une transparence accrue sur les chiffres de vente nets. Le score de pré-sélection est de 78/100, indiquant un signal mixte mais prometteur. Nous recommandons de considérer ce dossier avec une diligence approfondie.</a:t>
             </a:r>
           </a:p>
         </p:txBody>
@@ -1726,7 +1726,7 @@
           <a:lstStyle/>
           <a:p>
             <a:r>
-              <a:t>Les 'Géants' sont Adyen, Cloudbeds et Shiji Group. Malgré leurs ressources considérables, ils se concentrent sur la croissance organique ou les partenariats plutôt que sur les acquisitions agressives. Ils agissent comme des forteresses, renforçant leurs positions existantes et optimisant leurs produits. Leur posture passive sur le front des M&amp;A ne signifie pas inactivité, mais une priorisation différente.</a:t>
+              <a:t>Notre analyse SWOT identifie les forces et faiblesses de Katanox. Parmi les forces, l'expertise de Paul Beukers d'Adyen, un score stratégique élevé dans les paiements hôteliers, et des licences PSD2/FCA robustes sont notables. Les faiblesses incluent la dépendance au leadership du fondateur, des financements limités face à l'expansion, et un manque de transparence sur les revenus.</a:t>
             </a:r>
           </a:p>
         </p:txBody>
@@ -1796,7 +1796,7 @@
           <a:lstStyle/>
           <a:p>
             <a:r>
-              <a:t>Enfin, les 'Cibles Potentielles' sont Canary Technologies, la Banque de France et Trevium. Ces entreprises, souvent avec une capacité moindre ou une posture passive, pourraient être des cibles d'acquisition ou des partenaires stratégiques. La Banque de France, en tant qu'institution, est une cible unique. Canary Technologies, malgré son financement, privilégie la croissance organique, la rendant potentiellement attractive pour des acquisitions.</a:t>
+              <a:t>Les opportunités sont significatives, avec un marché TAM de 2,9 milliards USD en forte croissance, le lancement de Katanox Capital, et une expansion en Amérique du Nord. Cependant, des menaces subsistent, notamment la concurrence directe de Mews et Worldline, l'érosion par les intégrations natives d'Oracle, et les perturbations réglementaires par Wero/EPI. Un plan d'action doit être mis en place pour gérer ces risques.</a:t>
             </a:r>
           </a:p>
         </p:txBody>
@@ -1866,7 +1866,7 @@
           <a:lstStyle/>
           <a:p>
             <a:r>
-              <a:t>Les scénarios stratégiques révèlent des mouvements complexes d'alliances, d'acquisitions et de confrontations. Les batailles d'acquisition pour Katanox et Canary Technologies sont au cœur des préoccupations. Des alliances inévitables entre Mews et Katanox pourraient dominer les paiements directs. Des menaces d'étranglement pèsent sur Katanox de la part d'Oracle et Mews. Ces dynamiques définissent le futur du paysage concurrentiel.</a:t>
+              <a:t>Notre plan d'action se concentre sur la défense, l'offensive, le coup de grâce et la remédiation. En défense, nous devons renforcer les intégrations PMS et user des licences PSD2/FCA comme un moat réglementaire. En offensive, scaler Katanox Capital via l'expertise Adyen de Paul Beukers. Le coup de grâce serait un échec à sécuriser des intégrations PMS majeures. La remédiation consiste à recruter un Head of People pour mieux scaler l'équipe et prouver une traction de revenus significative.</a:t>
             </a:r>
           </a:p>
         </p:txBody>
@@ -1936,7 +1936,7 @@
           <a:lstStyle/>
           <a:p>
             <a:r>
-              <a:t>Ce diagramme résume un ensemble de scénarios stratégiques hypothétiques, mais basés sur des signaux de marché réels. On voit que Katanox est au centre de plusieurs dynamiques, notamment des batailles d'acquisition et des synergies potentielles avec de grands acteurs. Cette visualisation nous aide à anticiper les mouvements stratégiques et à positionner Katanox dans ce jeu d'échecs M&amp;A. Le sujet est brûlant et les opportunités, comme les menaces, sont nombreuses.</a:t>
+              <a:t>Notre thèse d'investissement est de type B, stratégique, axée sur la transformation de S4BT en hub de paiement réglementé pour le voyage d'affaires. L'acquisition de Katanox, grâce à ses licences PSD2/FCA, sa connectivité A2A et son expertise Adyen, serait un actif Kingmaker. Elle permettrait à S4BT d'intégrer des services de paiement directs et d'éliminer des intermédiaires coûteux. Cependant, des conditions suspensives sur la certification ISO 27001 et le module TVA doivent être levées.</a:t>
             </a:r>
           </a:p>
         </p:txBody>
@@ -2006,7 +2006,7 @@
           <a:lstStyle/>
           <a:p>
             <a:r>
-              <a:t>Passons maintenant à l'analyse plus concrète de Katanox. Nous allons explorer en détail sa proposition de valeur, son produit, son modèle économique, et bien sûr, l'équipe qui la porte. Cette section est essentielle pour comprendre la raison d'être de Katanox et son potentiel à transformer le marché de l'hôtellerie.</a:t>
+              <a:t>Notre conviction se porte sur un angle stratégique centré sur les paiements, la réconciliation et la récupération de TVA dans le voyage d'affaires. Le marché est attractif et le timing est optimal en raison des mandats de digitalisation et des licences PSD2/FCA de Katanox. L'entreprise Katanox est une infrastructure financière B2B innovante. Le fondateur, Paul Beukers, est un expert reconnu, bien que le risque de dépendance à sa personne soit élevé. La correspondance avec notre thèse est forte, mais conditionnelle aux vérifications.</a:t>
             </a:r>
           </a:p>
         </p:txBody>
@@ -2076,7 +2076,7 @@
           <a:lstStyle/>
           <a:p>
             <a:r>
-              <a:t>Passons à la question cruciale : Katanox, un 'Call' ou un 'Pass' pour notre pipeline M&amp;A ? Sur la base de notre score de pré-sélection, Katanox obtient un 78/100, ce qui la positionne dans la catégorie 'Signal Mixte'. Notre verdict est un 'Consider (M&amp;A)'. Cela signifie que le dossier présente un intérêt stratégique certain, mais nécessite une due diligence approfondie et la levée de plusieurs conditions suspensives avant de pouvoir passer en 'Conviction'. Des challenges importants subsistent notamment sur la résilience du modèle et la couverture fonctionnelle par rapport à notre thèse. Nous allons détailler pourquoi.</a:t>
+              <a:t>Notre analyse top-down du marché révèle un TAM de 2,9 milliards de dollars, principalement soutenu par des rapports sectoriels. Le SAM européen, plus spécifique, est d'environ 0,85 milliard de dollars. Ces estimations sont cruciales pour comprendre l'ampleur de l'opportunité et la position de Katanox dans ce marché en forte croissance. Les sources sont des rapports spécialisés reconnus.</a:t>
             </a:r>
           </a:p>
         </p:txBody>
@@ -2146,7 +2146,7 @@
           <a:lstStyle/>
           <a:p>
             <a:r>
-              <a:t>La proposition de valeur de Katanox est claire : elle veut remplacer les réseaux de cartes obsolètes de l'hôtellerie par des paiements directs de compte à compte, agissant comme un moteur de croissance pour le voyage. Son ICP se compose d'hôtels, de groupes hôteliers et d'agences de voyages. Katanox est une plateforme B2B opérant dans la FinTech, spécifiquement l'infrastructure financière automatisée pour l'hôtellerie. L'entreprise est basée à Amsterdam, Londres et New York, et a déjà attiré des clients clés comme Travelodge et Wyndham Hotels.</a:t>
+              <a:t>La valorisation d'entrée de Katanox est de 13,6 millions d'euros, basée sur les multiples sectoriels de l'ARR. La valeur d'acquisition totale, incluant les synergies nettes, est estimée à 32,1 millions d'euros. Cette valeur est calculée selon le cadre Damodaran, qui estime la valeur d'une entreprise pour un acquéreur spécifique en tenant compte des synergies. La transaction génère une marge de création de valeur de 18,6 millions d'euros.</a:t>
             </a:r>
           </a:p>
         </p:txBody>
@@ -2216,7 +2216,7 @@
           <a:lstStyle/>
           <a:p>
             <a:r>
-              <a:t>La solution de Katanox est une plateforme unifiée qui automatise les paiements, les règlements et la distribution sans intermédiaires. Parmi ses fonctionnalités clés, on trouve les paiements de compte à compte, la réconciliation des commissions, la gestion des stocks en direct et le 'Katanox Capital' pour la liquidité. Techniquement, elle repose sur une infrastructure financière intégrée via API-first, avec des licences PSD2 et FCA, assurant sécurité et conformité. Les cas d'utilisation incluent l'élimination des commissions VCC et l'automatisation des transactions B2B.</a:t>
+              <a:t>Le compte de résultat prévisionnel pour Katanox montre des revenus SaaS récurrents en croissance, passant de 2,58 millions d'euros en Y1 à 6,52 millions d'euros en Y6. La marge brute reste stable autour de 73%. L'EBITDA, initialement faible, devrait atteindre 0,68 million d'euros en Y6 pour l'activité autonome. Les synergies d'acquisition devraient significativement améliorer ces chiffres, portant l'EBITDA post-synergies à 11,86 millions d'euros en Y6.</a:t>
             </a:r>
           </a:p>
         </p:txBody>
@@ -2286,7 +2286,7 @@
           <a:lstStyle/>
           <a:p>
             <a:r>
-              <a:t>Le modèle économique de Katanox est hybride : un SaaS avec des services financiers intégrés. La rentabilité est générée par des commissions sur les transactions, des frais sur les avances de fonds (Katanox Capital) et des frais d'accès à la plateforme de distribution. L'ARPU est estimé à environ 2 000 euros annuels par propriété, avec une fourchette entre 1 140 et 3 000 euros. Ce modèle vise à solidifier les revenus récurrents et à valoriser chaque module. Le détail des plans tarifaires spécifiques n'est pas encore public.</a:t>
+              <a:t>Le flux de trésorerie disponible (FCF) autonome de Katanox reste négatif sur les cinq premières années, passant de -0,22 million d'euros en Y1 à -0,18 million d'euros en Y5. Toutefois, l'intégration des synergies M&amp;A transforme radicalement ce tableau. Le FCF total post-synergies passe à +10,97 millions d'euros en Y5, démontrant la puissance des synergies pour rendre le deal attractif.</a:t>
             </a:r>
           </a:p>
         </p:txBody>
@@ -2356,7 +2356,7 @@
           <a:lstStyle/>
           <a:p>
             <a:r>
-              <a:t>L'équipe de Katanox se distingue par une forte culture d'entreprise, orientée vers l'efficacité et la collaboration. Le leadership est structuré autour de hubs internationaux à Amsterdam, Londres et New York. L'effectif est estimé entre 50 et 150 employés. Ces chiffres et cette organisation sont cruciaux pour une scale-up ayant des ambitions aussi vastes. Le défi ici est de maintenir la cohérence et la culture d'entreprise avec une équipe répartie sur plusieurs fuseaux horaires.</a:t>
+              <a:t>Notre analyse ROI du deal Katanox est très positive. Le MOIC est de 2,37x et l'IRR de 30,1%, dépassant largement nos seuils d'exigence (1,10x et 10%). Cela signifie que, même avec une évaluation prudente des synergies, Katanox présente un excellent retour sur investissement. Le dossier est donc défendable en comité, à condition de lever les conditions suspensives identifiées.</a:t>
             </a:r>
           </a:p>
         </p:txBody>
@@ -2426,7 +2426,7 @@
           <a:lstStyle/>
           <a:p>
             <a:r>
-              <a:t>Paul Beukers, CCO et co-fondateur, est l'un des piliers de Katanox. Son pedigree chez Adyen, où il a géré des comptes d'envergure et dirigé le développement produit, lui confère une expertise unique dans les paiements B2B et l'optimisation des processus. Son parcours est celui d'un opérateur commercial qui a su adapter son savoir-faire à l'hôtellerie. Son score ADN est de 84/100, avec une exécution à 90/100, ce qui est très impressionnant. Son point aveugle potentiel réside dans le leadership multiplicateur, moins dans la performance individuelle.</a:t>
+              <a:t>Je vous invite à passer à la section Questions &amp; Réponses. Quel est votre avis sur les risques critiques identifiés, notamment le décalage de profil client de Katanox et la non-confirmation de la certification ISO 27001 ? Ces points sont essentiels à valider pour la faisabilité de l'acquisition. Je suis à votre disposition pour toute question.</a:t>
             </a:r>
           </a:p>
         </p:txBody>
@@ -2496,7 +2496,7 @@
           <a:lstStyle/>
           <a:p>
             <a:r>
-              <a:t>En résumé, Katanox est une FinTech d'infrastructure financière automatisée pour l'hôtellerie qui s'attaque à un problème majeur : la réconciliation manuelle des cartes de crédit virtuelles coûte jusqu'à 3% de la marge nette. Leur solution, une plateforme API-first, connecte directement les systèmes de réservation des hôtels aux comptes bancaires B2B, permettant un versement instantané. L'équipe, menée par Paul Beukers, a un fort potentiel, et le marché est en pleine croissance. Notre score de pré-sélection est de 78/100, un 'Signal Mixte' qui justifie un 'Consider (M&amp;A)'.</a:t>
+              <a:t>En conclusion, l'acquisition de Katanox représente une opportunité stratégique majeure pour S4BT. Les synergies sont réelles et quantifiables, et le retour sur investissement est attractif. Nous devons maintenant procéder à une diligence raisonnable approfondie pour lever les incertitudes et concrétiser cette transaction aux yeux du conseil d'administration. Merci de votre attention.</a:t>
             </a:r>
           </a:p>
         </p:txBody>
@@ -2566,7 +2566,7 @@
           <a:lstStyle/>
           <a:p>
             <a:r>
-              <a:t>Voici l'index de notre présentation. Nous allons d'abord explorer la dynamique du marché, puis plonger dans l'analyse de l'entreprise Katanox elle-même. Ensuite, nous procéderons à une évaluation stratégique de sa proposition. La quatrième partie sera dédiée à notre thèse d'investissement et comment Katanox s'y intègre. Enfin, nous aborderons les aspects financiers et notre conviction, avant de conclure. Chacune de ces sections est conçue pour nous donner une vision complète et étayée du potentiel d'acquisition.</a:t>
+              <a:t>En complément, notre analyse bottom-up valide la taille du marché en calculant le potentiel basé sur le nombre de clients et l'économie unitaire. Nous estimons un marché adressable de 100 millions d'euros en Europe, sur la base de 50 000 établissements hôteliers potentiels et d'un ARPU moyen de 2 000 euros par an. Cette approche calculée renforce la crédibilité de nos estimations.</a:t>
             </a:r>
           </a:p>
         </p:txBody>
@@ -2636,7 +2636,7 @@
           <a:lstStyle/>
           <a:p>
             <a:r>
-              <a:t>Le marché de l'infrastructure financière automatisée pour l'hôtellerie est l'un des plus dynamiques du secteur. Ce segment représente aujourd'hui une opportunité considérable pour les acteurs capables de résoudre les inefficiences historiques liées aux paiements et à la distribution. Katanox évolue précisément dans cet espace, en proposant des solutions qui répondent à des besoins pressants du marché. Nous allons voir en détail les chiffres de ce marché, sa chaîne de valeur et les acteurs clés qui y opèrent.</a:t>
+              <a:t>La triangulation des approches top-down et bottom-up confirme la solidité de nos estimations. Malgré des écarts liés à la granularité des données, les ordres de grandeur convergent, ce qui valide la fiabilité de nos prévisions sur le TAM et le SAM. Ces deux méthodes se complètent pour nous donner une vision cohérente de l'attractivité du marché.</a:t>
             </a:r>
           </a:p>
         </p:txBody>
@@ -2706,7 +2706,7 @@
           <a:lstStyle/>
           <a:p>
             <a:r>
-              <a:t>Pour évaluer la taille du marché, nous avons utilisé une approche de triangulation combinant une analyse 'Top-Down' et 'Bottom-Up'. L'approche Top-Down révèle un TAM mondial de 2,9 milliards de dollars, porté par un CAGR de 19-20%. Le marché européen représente déjà 0,85 milliard de dollars, signalant une forte opportunité pour Katanox. Nous allons approfondir cette analyse sur les prochaines diapositives.</a:t>
+              <a:t>La chaîne de valeur de l'hôtellerie est segmentée en six étapes clés. Le financement et la gestion de trésorerie initient les flux. La facturation et le revenue management optimisent les recettes. Les paiements et règlements directs, cœur de métier de Katanox, orchestrent les transactions. Suivent la réconciliation et la conformité, puis l'intégration et l'orchestration des systèmes, et enfin le pilotage de la performance. Chaque étape est évaluée pour son score stratégique.</a:t>
             </a:r>
           </a:p>
         </p:txBody>
@@ -2776,7 +2776,7 @@
           <a:lstStyle/>
           <a:p>
             <a:r>
-              <a:t>Notre analyse Top-Down, effectuée à partir d'entonnoirs de marché, révèle un Marché Total Adressable (TAM) de 2,9 milliards USD pour les plateformes d'orchestration de paiements hôteliers. Notre Marché Adressable de Service (SAM) en Europe s'élève à 0,85 milliard USD, représentant la part spécifique à Katanox. Enfin, notre Marché Obtenable de Service (SOM), l'objectif réaliste à court terme pour Katanox, est fixé à 42,5 millions USD. Ces chiffres montrent un marché vaste et en forte croissance, avec une part significative à conquérir.</a:t>
+              <a:t>La chaîne de valeur de Katanox, que nous avons analysée en détail, montre une série d'étapes clés dans l'infrastructure financière automatisée pour l'hôtellerie. Chaque étape présente des niveaux de défendabilité, de potentiel de marge et de croissance différents. Le financement et la gestion de trésorerie, ainsi que la facturation et le revenue management, sont des étapes cruciales, affichant des scores stratégiques élevés.</a:t>
             </a:r>
           </a:p>
         </p:txBody>
@@ -2846,7 +2846,7 @@
           <a:lstStyle/>
           <a:p>
             <a:r>
-              <a:t>L'approche Bottom-Up, basée sur le nombre de clients potentiels et l'économie unitaire, nous donne une perspective complémentaire. En Europe, nous estimons 50 000 établissements hôteliers potentiellement clients, avec un prix moyen annuel de 2 000 € par propriété. Cela nous mène à un Marché Adressable de Service de 100 millions d'euros. Cette estimation, bien que plus conservatrice, valide l'ordre de grandeur des chiffres Top-Down.</a:t>
+              <a:t>Les étapes des paiements et règlements directs, suivie de la réconciliation et de la conformité, sont également vitales, avec des scores stratégiques très bons. Enfin, l'intégration et l'orchestration, ainsi que le pilotage de la performance, complètent cette chaîne de valeur. Comprendre ces étapes nous aide à situer précisément où Katanox ajoute de la valeur et où résident les opportunités de consolidation.</a:t>
             </a:r>
           </a:p>
         </p:txBody>
@@ -2916,7 +2916,7 @@
           <a:lstStyle/>
           <a:p>
             <a:r>
-              <a:t>En comparant les deux approches, on constate une convergence satisfaisante. Le Top-Down indique un SAM européen d'environ 765 millions d'euros, tandis que le Bottom-Up donne 100 millions d'euros. L'écart Bottom-Up étant plus conservateur, cela valide la robustesse de l'estimation de l'ordre de grandeur du marché. Cette triangulation renforce notre confiance dans le potentiel de marché global pour Katanox. Le marché est bel et bien là et il est substantiel.</a:t>
+              <a:t>Les trois positions les plus stratégiques de cette chaîne de valeur sont la facturation et le revenue management avec un score de 8.1, les paiements et règlements directs à 8.0, et l'intégration et l'orchestration à 7.2. Ces étapes offrent un équilibre exceptionnel entre moats techniques, marges SaaS premium et forte croissance tirée par l'IA et les régulations comme PSD2.</a:t>
             </a:r>
           </a:p>
         </p:txBody>
